--- a/template.pptx.pptx
+++ b/template.pptx.pptx
@@ -5,10 +5,11 @@
     <p:sldMasterId id="2147483672" r:id="rId1"/>
   </p:sldMasterIdLst>
   <p:notesMasterIdLst>
-    <p:notesMasterId r:id="rId3"/>
+    <p:notesMasterId r:id="rId4"/>
   </p:notesMasterIdLst>
   <p:sldIdLst>
     <p:sldId id="11518" r:id="rId2"/>
+    <p:sldId id="11519" r:id="rId3"/>
   </p:sldIdLst>
   <p:sldSz cx="12192000" cy="6858000"/>
   <p:notesSz cx="6797675" cy="9926638"/>
@@ -113,6 +114,7 @@
         <p14:section name="리더십 영향력 진단" id="{36EF8F81-4E80-4DF0-895E-8453566FB0F8}">
           <p14:sldIdLst>
             <p14:sldId id="11518"/>
+            <p14:sldId id="11519"/>
           </p14:sldIdLst>
         </p14:section>
       </p14:sectionLst>
@@ -1057,6 +1059,898 @@
 </c:chartSpace>
 </file>
 
+<file path=ppt/charts/chart3.xml><?xml version="1.0" encoding="utf-8"?>
+<c:chartSpace xmlns:c="http://schemas.openxmlformats.org/drawingml/2006/chart" xmlns:a="http://schemas.openxmlformats.org/drawingml/2006/main" xmlns:r="http://schemas.openxmlformats.org/officeDocument/2006/relationships" xmlns:c16r2="http://schemas.microsoft.com/office/drawing/2015/06/chart">
+  <c:date1904 val="0"/>
+  <c:lang val="ko-KR"/>
+  <c:roundedCorners val="0"/>
+  <mc:AlternateContent xmlns:mc="http://schemas.openxmlformats.org/markup-compatibility/2006">
+    <mc:Choice xmlns:c14="http://schemas.microsoft.com/office/drawing/2007/8/2/chart" Requires="c14">
+      <c14:style val="102"/>
+    </mc:Choice>
+    <mc:Fallback>
+      <c:style val="2"/>
+    </mc:Fallback>
+  </mc:AlternateContent>
+  <c:chart>
+    <c:autoTitleDeleted val="1"/>
+    <c:plotArea>
+      <c:layout/>
+      <c:barChart>
+        <c:barDir val="col"/>
+        <c:grouping val="clustered"/>
+        <c:varyColors val="0"/>
+        <c:ser>
+          <c:idx val="0"/>
+          <c:order val="0"/>
+          <c:tx>
+            <c:strRef>
+              <c:f>Sheet1!$B$1</c:f>
+              <c:strCache>
+                <c:ptCount val="1"/>
+                <c:pt idx="0">
+                  <c:v>계열 1</c:v>
+                </c:pt>
+              </c:strCache>
+            </c:strRef>
+          </c:tx>
+          <c:spPr>
+            <a:solidFill>
+              <a:schemeClr val="bg1">
+                <a:lumMod val="65000"/>
+              </a:schemeClr>
+            </a:solidFill>
+            <a:ln>
+              <a:noFill/>
+            </a:ln>
+            <a:effectLst/>
+          </c:spPr>
+          <c:invertIfNegative val="0"/>
+          <c:dPt>
+            <c:idx val="0"/>
+            <c:invertIfNegative val="0"/>
+            <c:bubble3D val="0"/>
+            <c:spPr>
+              <a:solidFill>
+                <a:schemeClr val="bg1">
+                  <a:lumMod val="65000"/>
+                </a:schemeClr>
+              </a:solidFill>
+              <a:ln>
+                <a:noFill/>
+              </a:ln>
+              <a:effectLst/>
+            </c:spPr>
+            <c:extLst>
+              <c:ext xmlns:c16="http://schemas.microsoft.com/office/drawing/2014/chart" uri="{C3380CC4-5D6E-409C-BE32-E72D297353CC}">
+                <c16:uniqueId val="{00000006-B104-4782-9752-FC5D25AE17EC}"/>
+              </c:ext>
+            </c:extLst>
+          </c:dPt>
+          <c:dPt>
+            <c:idx val="1"/>
+            <c:invertIfNegative val="0"/>
+            <c:bubble3D val="0"/>
+            <c:spPr>
+              <a:solidFill>
+                <a:srgbClr val="4480B1"/>
+              </a:solidFill>
+              <a:ln>
+                <a:noFill/>
+              </a:ln>
+              <a:effectLst/>
+            </c:spPr>
+            <c:extLst>
+              <c:ext xmlns:c16="http://schemas.microsoft.com/office/drawing/2014/chart" uri="{C3380CC4-5D6E-409C-BE32-E72D297353CC}">
+                <c16:uniqueId val="{00000005-B104-4782-9752-FC5D25AE17EC}"/>
+              </c:ext>
+            </c:extLst>
+          </c:dPt>
+          <c:dPt>
+            <c:idx val="3"/>
+            <c:invertIfNegative val="0"/>
+            <c:bubble3D val="0"/>
+            <c:spPr>
+              <a:solidFill>
+                <a:srgbClr val="A6A6A6"/>
+              </a:solidFill>
+              <a:ln>
+                <a:noFill/>
+              </a:ln>
+              <a:effectLst/>
+            </c:spPr>
+            <c:extLst>
+              <c:ext xmlns:c16="http://schemas.microsoft.com/office/drawing/2014/chart" uri="{C3380CC4-5D6E-409C-BE32-E72D297353CC}">
+                <c16:uniqueId val="{00000001-B104-4782-9752-FC5D25AE17EC}"/>
+              </c:ext>
+            </c:extLst>
+          </c:dPt>
+          <c:dPt>
+            <c:idx val="4"/>
+            <c:invertIfNegative val="0"/>
+            <c:bubble3D val="0"/>
+            <c:spPr>
+              <a:solidFill>
+                <a:schemeClr val="bg1">
+                  <a:lumMod val="65000"/>
+                </a:schemeClr>
+              </a:solidFill>
+              <a:ln>
+                <a:noFill/>
+              </a:ln>
+              <a:effectLst/>
+            </c:spPr>
+            <c:extLst>
+              <c:ext xmlns:c16="http://schemas.microsoft.com/office/drawing/2014/chart" uri="{C3380CC4-5D6E-409C-BE32-E72D297353CC}">
+                <c16:uniqueId val="{00000003-B104-4782-9752-FC5D25AE17EC}"/>
+              </c:ext>
+            </c:extLst>
+          </c:dPt>
+          <c:dPt>
+            <c:idx val="5"/>
+            <c:invertIfNegative val="0"/>
+            <c:bubble3D val="0"/>
+            <c:spPr>
+              <a:solidFill>
+                <a:srgbClr val="C00000"/>
+              </a:solidFill>
+              <a:ln>
+                <a:noFill/>
+              </a:ln>
+              <a:effectLst/>
+            </c:spPr>
+            <c:extLst>
+              <c:ext xmlns:c16="http://schemas.microsoft.com/office/drawing/2014/chart" uri="{C3380CC4-5D6E-409C-BE32-E72D297353CC}">
+                <c16:uniqueId val="{00000008-3416-448A-8AC1-73DA252A7795}"/>
+              </c:ext>
+            </c:extLst>
+          </c:dPt>
+          <c:dLbls>
+            <c:spPr>
+              <a:noFill/>
+              <a:ln>
+                <a:noFill/>
+              </a:ln>
+              <a:effectLst/>
+            </c:spPr>
+            <c:txPr>
+              <a:bodyPr rot="0" spcFirstLastPara="1" vertOverflow="ellipsis" vert="horz" wrap="square" lIns="38100" tIns="19050" rIns="38100" bIns="19050" anchor="ctr" anchorCtr="0">
+                <a:spAutoFit/>
+              </a:bodyPr>
+              <a:lstStyle/>
+              <a:p>
+                <a:pPr algn="ctr">
+                  <a:defRPr lang="en-US" altLang="ko-KR" sz="1100" b="1" i="0" u="none" strike="noStrike" kern="1200" baseline="0">
+                    <a:ln>
+                      <a:solidFill>
+                        <a:srgbClr val="4DB848">
+                          <a:alpha val="0"/>
+                        </a:srgbClr>
+                      </a:solidFill>
+                    </a:ln>
+                    <a:solidFill>
+                      <a:schemeClr val="tx1">
+                        <a:lumMod val="65000"/>
+                        <a:lumOff val="35000"/>
+                      </a:schemeClr>
+                    </a:solidFill>
+                    <a:latin typeface="Arial" panose="020B0604020202020204" pitchFamily="34" charset="0"/>
+                    <a:ea typeface="KoPub돋움체 Bold" panose="02020603020101020101" pitchFamily="18" charset="-127"/>
+                    <a:cs typeface="Arial" panose="020B0604020202020204" pitchFamily="34" charset="0"/>
+                  </a:defRPr>
+                </a:pPr>
+                <a:endParaRPr lang="ko-KR"/>
+              </a:p>
+            </c:txPr>
+            <c:dLblPos val="outEnd"/>
+            <c:showLegendKey val="0"/>
+            <c:showVal val="1"/>
+            <c:showCatName val="0"/>
+            <c:showSerName val="0"/>
+            <c:showPercent val="0"/>
+            <c:showBubbleSize val="0"/>
+            <c:showLeaderLines val="0"/>
+            <c:extLst>
+              <c:ext xmlns:c15="http://schemas.microsoft.com/office/drawing/2012/chart" uri="{CE6537A1-D6FC-4f65-9D91-7224C49458BB}">
+                <c15:showLeaderLines val="1"/>
+                <c15:leaderLines>
+                  <c:spPr>
+                    <a:ln w="9525" cap="flat" cmpd="sng" algn="ctr">
+                      <a:solidFill>
+                        <a:schemeClr val="dk1">
+                          <a:lumMod val="35000"/>
+                          <a:lumOff val="65000"/>
+                        </a:schemeClr>
+                      </a:solidFill>
+                      <a:round/>
+                    </a:ln>
+                    <a:effectLst/>
+                  </c:spPr>
+                </c15:leaderLines>
+              </c:ext>
+            </c:extLst>
+          </c:dLbls>
+          <c:cat>
+            <c:strRef>
+              <c:f>Sheet1!$A$2:$A$7</c:f>
+              <c:strCache>
+                <c:ptCount val="6"/>
+                <c:pt idx="0">
+                  <c:v>Position</c:v>
+                </c:pt>
+                <c:pt idx="1">
+                  <c:v>Personality</c:v>
+                </c:pt>
+                <c:pt idx="2">
+                  <c:v>Relationship</c:v>
+                </c:pt>
+                <c:pt idx="3">
+                  <c:v>Results</c:v>
+                </c:pt>
+                <c:pt idx="4">
+                  <c:v>Development</c:v>
+                </c:pt>
+                <c:pt idx="5">
+                  <c:v>Principles</c:v>
+                </c:pt>
+              </c:strCache>
+            </c:strRef>
+          </c:cat>
+          <c:val>
+            <c:numRef>
+              <c:f>Sheet1!$B$2:$B$7</c:f>
+              <c:numCache>
+                <c:formatCode>0.00</c:formatCode>
+                <c:ptCount val="6"/>
+                <c:pt idx="0">
+                  <c:v>3.8333333333333335</c:v>
+                </c:pt>
+                <c:pt idx="1">
+                  <c:v>4</c:v>
+                </c:pt>
+                <c:pt idx="2">
+                  <c:v>2.8333333333333335</c:v>
+                </c:pt>
+                <c:pt idx="3">
+                  <c:v>3.75</c:v>
+                </c:pt>
+                <c:pt idx="4">
+                  <c:v>3.75</c:v>
+                </c:pt>
+                <c:pt idx="5">
+                  <c:v>2</c:v>
+                </c:pt>
+              </c:numCache>
+            </c:numRef>
+          </c:val>
+          <c:extLst>
+            <c:ext xmlns:c16="http://schemas.microsoft.com/office/drawing/2014/chart" uri="{C3380CC4-5D6E-409C-BE32-E72D297353CC}">
+              <c16:uniqueId val="{00000004-B104-4782-9752-FC5D25AE17EC}"/>
+            </c:ext>
+          </c:extLst>
+        </c:ser>
+        <c:dLbls>
+          <c:showLegendKey val="0"/>
+          <c:showVal val="0"/>
+          <c:showCatName val="0"/>
+          <c:showSerName val="0"/>
+          <c:showPercent val="0"/>
+          <c:showBubbleSize val="0"/>
+        </c:dLbls>
+        <c:gapWidth val="267"/>
+        <c:overlap val="-43"/>
+        <c:axId val="1790661103"/>
+        <c:axId val="1790680239"/>
+      </c:barChart>
+      <c:catAx>
+        <c:axId val="1790661103"/>
+        <c:scaling>
+          <c:orientation val="minMax"/>
+        </c:scaling>
+        <c:delete val="0"/>
+        <c:axPos val="b"/>
+        <c:majorGridlines>
+          <c:spPr>
+            <a:ln w="6350" cap="flat" cmpd="sng" algn="ctr">
+              <a:solidFill>
+                <a:schemeClr val="dk1">
+                  <a:lumMod val="15000"/>
+                  <a:lumOff val="85000"/>
+                </a:schemeClr>
+              </a:solidFill>
+              <a:round/>
+            </a:ln>
+            <a:effectLst/>
+          </c:spPr>
+        </c:majorGridlines>
+        <c:numFmt formatCode="General" sourceLinked="1"/>
+        <c:majorTickMark val="none"/>
+        <c:minorTickMark val="none"/>
+        <c:tickLblPos val="nextTo"/>
+        <c:spPr>
+          <a:noFill/>
+          <a:ln w="9525" cap="flat" cmpd="sng" algn="ctr">
+            <a:solidFill>
+              <a:schemeClr val="dk1">
+                <a:lumMod val="15000"/>
+                <a:lumOff val="85000"/>
+              </a:schemeClr>
+            </a:solidFill>
+            <a:round/>
+          </a:ln>
+          <a:effectLst/>
+        </c:spPr>
+        <c:txPr>
+          <a:bodyPr rot="-60000000" spcFirstLastPara="1" vertOverflow="ellipsis" vert="horz" wrap="square" anchor="ctr" anchorCtr="1"/>
+          <a:lstStyle/>
+          <a:p>
+            <a:pPr algn="ctr">
+              <a:defRPr lang="en-US" altLang="ko-KR" sz="1100" b="1" i="0" u="none" strike="noStrike" kern="1200" cap="none" spc="0" normalizeH="0" baseline="0">
+                <a:ln>
+                  <a:solidFill>
+                    <a:srgbClr val="4DB848">
+                      <a:alpha val="0"/>
+                    </a:srgbClr>
+                  </a:solidFill>
+                </a:ln>
+                <a:solidFill>
+                  <a:schemeClr val="tx1">
+                    <a:lumMod val="65000"/>
+                    <a:lumOff val="35000"/>
+                  </a:schemeClr>
+                </a:solidFill>
+                <a:latin typeface="Arial" panose="020B0604020202020204" pitchFamily="34" charset="0"/>
+                <a:ea typeface="KoPub돋움체 Bold" panose="02020603020101020101" pitchFamily="18" charset="-127"/>
+                <a:cs typeface="Arial" panose="020B0604020202020204" pitchFamily="34" charset="0"/>
+              </a:defRPr>
+            </a:pPr>
+            <a:endParaRPr lang="ko-KR"/>
+          </a:p>
+        </c:txPr>
+        <c:crossAx val="1790680239"/>
+        <c:crosses val="autoZero"/>
+        <c:auto val="1"/>
+        <c:lblAlgn val="ctr"/>
+        <c:lblOffset val="100"/>
+        <c:noMultiLvlLbl val="0"/>
+      </c:catAx>
+      <c:valAx>
+        <c:axId val="1790680239"/>
+        <c:scaling>
+          <c:orientation val="minMax"/>
+          <c:max val="5"/>
+        </c:scaling>
+        <c:delete val="0"/>
+        <c:axPos val="l"/>
+        <c:majorGridlines>
+          <c:spPr>
+            <a:ln w="3175" cap="flat" cmpd="sng" algn="ctr">
+              <a:solidFill>
+                <a:schemeClr val="dk1">
+                  <a:lumMod val="15000"/>
+                  <a:lumOff val="85000"/>
+                </a:schemeClr>
+              </a:solidFill>
+              <a:round/>
+            </a:ln>
+            <a:effectLst/>
+          </c:spPr>
+        </c:majorGridlines>
+        <c:numFmt formatCode="#,##0_);[Red]\(#,##0\)" sourceLinked="0"/>
+        <c:majorTickMark val="none"/>
+        <c:minorTickMark val="none"/>
+        <c:tickLblPos val="nextTo"/>
+        <c:spPr>
+          <a:noFill/>
+          <a:ln>
+            <a:noFill/>
+          </a:ln>
+          <a:effectLst/>
+        </c:spPr>
+        <c:txPr>
+          <a:bodyPr rot="-60000000" spcFirstLastPara="1" vertOverflow="ellipsis" vert="horz" wrap="square" anchor="ctr" anchorCtr="1"/>
+          <a:lstStyle/>
+          <a:p>
+            <a:pPr>
+              <a:defRPr sz="1000" b="0" i="0" u="none" strike="noStrike" kern="1200" baseline="0">
+                <a:solidFill>
+                  <a:schemeClr val="dk1">
+                    <a:lumMod val="65000"/>
+                    <a:lumOff val="35000"/>
+                  </a:schemeClr>
+                </a:solidFill>
+                <a:latin typeface="+mn-lt"/>
+                <a:ea typeface="+mn-ea"/>
+                <a:cs typeface="+mn-cs"/>
+              </a:defRPr>
+            </a:pPr>
+            <a:endParaRPr lang="ko-KR"/>
+          </a:p>
+        </c:txPr>
+        <c:crossAx val="1790661103"/>
+        <c:crosses val="autoZero"/>
+        <c:crossBetween val="between"/>
+        <c:majorUnit val="1"/>
+      </c:valAx>
+      <c:spPr>
+        <a:noFill/>
+        <a:ln>
+          <a:noFill/>
+        </a:ln>
+        <a:effectLst/>
+      </c:spPr>
+    </c:plotArea>
+    <c:plotVisOnly val="1"/>
+    <c:dispBlanksAs val="gap"/>
+    <c:showDLblsOverMax val="0"/>
+    <c:extLst>
+      <c:ext xmlns:c16r3="http://schemas.microsoft.com/office/drawing/2017/03/chart" uri="{56B9EC1D-385E-4148-901F-78D8002777C0}">
+        <c16r3:dataDisplayOptions16>
+          <c16r3:dispNaAsBlank val="1"/>
+        </c16r3:dataDisplayOptions16>
+      </c:ext>
+    </c:extLst>
+  </c:chart>
+  <c:spPr>
+    <a:noFill/>
+    <a:ln w="6350" cap="flat" cmpd="sng" algn="ctr">
+      <a:solidFill>
+        <a:schemeClr val="dk1">
+          <a:lumMod val="15000"/>
+          <a:lumOff val="85000"/>
+        </a:schemeClr>
+      </a:solidFill>
+      <a:round/>
+    </a:ln>
+    <a:effectLst/>
+  </c:spPr>
+  <c:txPr>
+    <a:bodyPr/>
+    <a:lstStyle/>
+    <a:p>
+      <a:pPr>
+        <a:defRPr/>
+      </a:pPr>
+      <a:endParaRPr lang="ko-KR"/>
+    </a:p>
+  </c:txPr>
+  <c:externalData r:id="rId3">
+    <c:autoUpdate val="0"/>
+  </c:externalData>
+</c:chartSpace>
+</file>
+
+<file path=ppt/charts/chart4.xml><?xml version="1.0" encoding="utf-8"?>
+<c:chartSpace xmlns:c="http://schemas.openxmlformats.org/drawingml/2006/chart" xmlns:a="http://schemas.openxmlformats.org/drawingml/2006/main" xmlns:r="http://schemas.openxmlformats.org/officeDocument/2006/relationships" xmlns:c16r2="http://schemas.microsoft.com/office/drawing/2015/06/chart">
+  <c:date1904 val="0"/>
+  <c:lang val="ko-KR"/>
+  <c:roundedCorners val="0"/>
+  <mc:AlternateContent xmlns:mc="http://schemas.openxmlformats.org/markup-compatibility/2006">
+    <mc:Choice xmlns:c14="http://schemas.microsoft.com/office/drawing/2007/8/2/chart" Requires="c14">
+      <c14:style val="102"/>
+    </mc:Choice>
+    <mc:Fallback>
+      <c:style val="2"/>
+    </mc:Fallback>
+  </mc:AlternateContent>
+  <c:chart>
+    <c:autoTitleDeleted val="1"/>
+    <c:plotArea>
+      <c:layout>
+        <c:manualLayout>
+          <c:layoutTarget val="inner"/>
+          <c:xMode val="edge"/>
+          <c:yMode val="edge"/>
+          <c:x val="3.5027446906468022E-2"/>
+          <c:y val="0.21674023637028964"/>
+          <c:w val="0.94848079897059345"/>
+          <c:h val="0.65508059593444368"/>
+        </c:manualLayout>
+      </c:layout>
+      <c:barChart>
+        <c:barDir val="col"/>
+        <c:grouping val="clustered"/>
+        <c:varyColors val="0"/>
+        <c:ser>
+          <c:idx val="0"/>
+          <c:order val="0"/>
+          <c:tx>
+            <c:strRef>
+              <c:f>Sheet1!$B$1</c:f>
+              <c:strCache>
+                <c:ptCount val="1"/>
+                <c:pt idx="0">
+                  <c:v>계열 1</c:v>
+                </c:pt>
+              </c:strCache>
+            </c:strRef>
+          </c:tx>
+          <c:spPr>
+            <a:solidFill>
+              <a:srgbClr val="FFC000"/>
+            </a:solidFill>
+            <a:ln>
+              <a:noFill/>
+            </a:ln>
+            <a:effectLst/>
+          </c:spPr>
+          <c:invertIfNegative val="0"/>
+          <c:dPt>
+            <c:idx val="3"/>
+            <c:invertIfNegative val="0"/>
+            <c:bubble3D val="0"/>
+            <c:spPr>
+              <a:solidFill>
+                <a:srgbClr val="2D5576"/>
+              </a:solidFill>
+              <a:ln>
+                <a:noFill/>
+              </a:ln>
+              <a:effectLst/>
+            </c:spPr>
+            <c:extLst>
+              <c:ext xmlns:c16="http://schemas.microsoft.com/office/drawing/2014/chart" uri="{C3380CC4-5D6E-409C-BE32-E72D297353CC}">
+                <c16:uniqueId val="{00000001-6DC0-489A-AF23-4ACC5E18609F}"/>
+              </c:ext>
+            </c:extLst>
+          </c:dPt>
+          <c:dPt>
+            <c:idx val="9"/>
+            <c:invertIfNegative val="0"/>
+            <c:bubble3D val="0"/>
+            <c:spPr>
+              <a:solidFill>
+                <a:srgbClr val="2D5576"/>
+              </a:solidFill>
+              <a:ln>
+                <a:noFill/>
+              </a:ln>
+              <a:effectLst/>
+            </c:spPr>
+            <c:extLst>
+              <c:ext xmlns:c16="http://schemas.microsoft.com/office/drawing/2014/chart" uri="{C3380CC4-5D6E-409C-BE32-E72D297353CC}">
+                <c16:uniqueId val="{00000003-6DC0-489A-AF23-4ACC5E18609F}"/>
+              </c:ext>
+            </c:extLst>
+          </c:dPt>
+          <c:dLbls>
+            <c:spPr>
+              <a:noFill/>
+              <a:ln>
+                <a:noFill/>
+              </a:ln>
+              <a:effectLst/>
+            </c:spPr>
+            <c:txPr>
+              <a:bodyPr rot="0" spcFirstLastPara="1" vertOverflow="ellipsis" vert="horz" wrap="square" lIns="38100" tIns="19050" rIns="38100" bIns="19050" anchor="ctr" anchorCtr="0">
+                <a:spAutoFit/>
+              </a:bodyPr>
+              <a:lstStyle/>
+              <a:p>
+                <a:pPr algn="ctr">
+                  <a:defRPr lang="en-US" altLang="ko-KR" sz="1100" b="1" i="0" u="none" strike="noStrike" kern="1200" baseline="0">
+                    <a:ln>
+                      <a:solidFill>
+                        <a:srgbClr val="4DB848">
+                          <a:alpha val="0"/>
+                        </a:srgbClr>
+                      </a:solidFill>
+                    </a:ln>
+                    <a:solidFill>
+                      <a:schemeClr val="tx1">
+                        <a:lumMod val="65000"/>
+                        <a:lumOff val="35000"/>
+                      </a:schemeClr>
+                    </a:solidFill>
+                    <a:latin typeface="Arial" panose="020B0604020202020204" pitchFamily="34" charset="0"/>
+                    <a:ea typeface="KoPub돋움체 Bold" panose="02020603020101020101" pitchFamily="18" charset="-127"/>
+                    <a:cs typeface="Arial" panose="020B0604020202020204" pitchFamily="34" charset="0"/>
+                  </a:defRPr>
+                </a:pPr>
+                <a:endParaRPr lang="ko-KR"/>
+              </a:p>
+            </c:txPr>
+            <c:dLblPos val="outEnd"/>
+            <c:showLegendKey val="0"/>
+            <c:showVal val="1"/>
+            <c:showCatName val="0"/>
+            <c:showSerName val="0"/>
+            <c:showPercent val="0"/>
+            <c:showBubbleSize val="0"/>
+            <c:showLeaderLines val="0"/>
+            <c:extLst>
+              <c:ext xmlns:c15="http://schemas.microsoft.com/office/drawing/2012/chart" uri="{CE6537A1-D6FC-4f65-9D91-7224C49458BB}">
+                <c15:showLeaderLines val="1"/>
+                <c15:leaderLines>
+                  <c:spPr>
+                    <a:ln w="9525" cap="flat" cmpd="sng" algn="ctr">
+                      <a:solidFill>
+                        <a:schemeClr val="dk1">
+                          <a:lumMod val="35000"/>
+                          <a:lumOff val="65000"/>
+                        </a:schemeClr>
+                      </a:solidFill>
+                      <a:round/>
+                    </a:ln>
+                    <a:effectLst/>
+                  </c:spPr>
+                </c15:leaderLines>
+              </c:ext>
+            </c:extLst>
+          </c:dLbls>
+          <c:cat>
+            <c:strRef>
+              <c:f>Sheet1!$A$2:$A$11</c:f>
+              <c:strCache>
+                <c:ptCount val="10"/>
+                <c:pt idx="0">
+                  <c:v>우호성</c:v>
+                </c:pt>
+                <c:pt idx="1">
+                  <c:v>동기유발</c:v>
+                </c:pt>
+                <c:pt idx="2">
+                  <c:v>자문</c:v>
+                </c:pt>
+                <c:pt idx="3">
+                  <c:v>평균</c:v>
+                </c:pt>
+                <c:pt idx="4">
+                  <c:v>협력제휴</c:v>
+                </c:pt>
+                <c:pt idx="5">
+                  <c:v>협상거래</c:v>
+                </c:pt>
+                <c:pt idx="6">
+                  <c:v>합리적설득</c:v>
+                </c:pt>
+                <c:pt idx="7">
+                  <c:v>합법화</c:v>
+                </c:pt>
+                <c:pt idx="8">
+                  <c:v>강요</c:v>
+                </c:pt>
+                <c:pt idx="9">
+                  <c:v>평균</c:v>
+                </c:pt>
+              </c:strCache>
+            </c:strRef>
+          </c:cat>
+          <c:val>
+            <c:numRef>
+              <c:f>Sheet1!$B$2:$B$11</c:f>
+              <c:numCache>
+                <c:formatCode>0.00</c:formatCode>
+                <c:ptCount val="10"/>
+                <c:pt idx="0">
+                  <c:v>3.75</c:v>
+                </c:pt>
+                <c:pt idx="1">
+                  <c:v>4</c:v>
+                </c:pt>
+                <c:pt idx="2">
+                  <c:v>4</c:v>
+                </c:pt>
+                <c:pt idx="3">
+                  <c:v>3.92</c:v>
+                </c:pt>
+                <c:pt idx="4">
+                  <c:v>3.25</c:v>
+                </c:pt>
+                <c:pt idx="5">
+                  <c:v>2.5</c:v>
+                </c:pt>
+                <c:pt idx="6">
+                  <c:v>4</c:v>
+                </c:pt>
+                <c:pt idx="7">
+                  <c:v>3.25</c:v>
+                </c:pt>
+                <c:pt idx="8">
+                  <c:v>2.75</c:v>
+                </c:pt>
+                <c:pt idx="9">
+                  <c:v>3.15</c:v>
+                </c:pt>
+              </c:numCache>
+            </c:numRef>
+          </c:val>
+          <c:extLst>
+            <c:ext xmlns:c16="http://schemas.microsoft.com/office/drawing/2014/chart" uri="{C3380CC4-5D6E-409C-BE32-E72D297353CC}">
+              <c16:uniqueId val="{00000004-6DC0-489A-AF23-4ACC5E18609F}"/>
+            </c:ext>
+          </c:extLst>
+        </c:ser>
+        <c:dLbls>
+          <c:showLegendKey val="0"/>
+          <c:showVal val="0"/>
+          <c:showCatName val="0"/>
+          <c:showSerName val="0"/>
+          <c:showPercent val="0"/>
+          <c:showBubbleSize val="0"/>
+        </c:dLbls>
+        <c:gapWidth val="267"/>
+        <c:overlap val="-43"/>
+        <c:axId val="1790661103"/>
+        <c:axId val="1790680239"/>
+      </c:barChart>
+      <c:catAx>
+        <c:axId val="1790661103"/>
+        <c:scaling>
+          <c:orientation val="minMax"/>
+        </c:scaling>
+        <c:delete val="0"/>
+        <c:axPos val="b"/>
+        <c:majorGridlines>
+          <c:spPr>
+            <a:ln w="6350" cap="flat" cmpd="sng" algn="ctr">
+              <a:solidFill>
+                <a:schemeClr val="dk1">
+                  <a:lumMod val="15000"/>
+                  <a:lumOff val="85000"/>
+                </a:schemeClr>
+              </a:solidFill>
+              <a:round/>
+            </a:ln>
+            <a:effectLst/>
+          </c:spPr>
+        </c:majorGridlines>
+        <c:numFmt formatCode="General" sourceLinked="1"/>
+        <c:majorTickMark val="none"/>
+        <c:minorTickMark val="none"/>
+        <c:tickLblPos val="nextTo"/>
+        <c:spPr>
+          <a:noFill/>
+          <a:ln w="9525" cap="flat" cmpd="sng" algn="ctr">
+            <a:solidFill>
+              <a:schemeClr val="dk1">
+                <a:lumMod val="15000"/>
+                <a:lumOff val="85000"/>
+              </a:schemeClr>
+            </a:solidFill>
+            <a:round/>
+          </a:ln>
+          <a:effectLst/>
+        </c:spPr>
+        <c:txPr>
+          <a:bodyPr rot="-60000000" spcFirstLastPara="1" vertOverflow="ellipsis" vert="horz" wrap="square" anchor="ctr" anchorCtr="1"/>
+          <a:lstStyle/>
+          <a:p>
+            <a:pPr algn="ctr">
+              <a:defRPr lang="en-US" altLang="ko-KR" sz="1100" b="0" i="0" u="none" strike="noStrike" kern="1200" cap="none" spc="0" normalizeH="0" baseline="0">
+                <a:ln>
+                  <a:solidFill>
+                    <a:srgbClr val="4DB848">
+                      <a:alpha val="0"/>
+                    </a:srgbClr>
+                  </a:solidFill>
+                </a:ln>
+                <a:solidFill>
+                  <a:schemeClr val="tx1">
+                    <a:lumMod val="65000"/>
+                    <a:lumOff val="35000"/>
+                  </a:schemeClr>
+                </a:solidFill>
+                <a:latin typeface="Arial" panose="020B0604020202020204" pitchFamily="34" charset="0"/>
+                <a:ea typeface="KoPub돋움체 Bold" panose="02020603020101020101" pitchFamily="18" charset="-127"/>
+                <a:cs typeface="Arial" panose="020B0604020202020204" pitchFamily="34" charset="0"/>
+              </a:defRPr>
+            </a:pPr>
+            <a:endParaRPr lang="ko-KR"/>
+          </a:p>
+        </c:txPr>
+        <c:crossAx val="1790680239"/>
+        <c:crosses val="autoZero"/>
+        <c:auto val="1"/>
+        <c:lblAlgn val="ctr"/>
+        <c:lblOffset val="100"/>
+        <c:noMultiLvlLbl val="0"/>
+      </c:catAx>
+      <c:valAx>
+        <c:axId val="1790680239"/>
+        <c:scaling>
+          <c:orientation val="minMax"/>
+        </c:scaling>
+        <c:delete val="0"/>
+        <c:axPos val="l"/>
+        <c:majorGridlines>
+          <c:spPr>
+            <a:ln w="3175" cap="flat" cmpd="sng" algn="ctr">
+              <a:solidFill>
+                <a:schemeClr val="dk1">
+                  <a:lumMod val="15000"/>
+                  <a:lumOff val="85000"/>
+                </a:schemeClr>
+              </a:solidFill>
+              <a:round/>
+            </a:ln>
+            <a:effectLst/>
+          </c:spPr>
+        </c:majorGridlines>
+        <c:numFmt formatCode="#,##0_);[Red]\(#,##0\)" sourceLinked="0"/>
+        <c:majorTickMark val="none"/>
+        <c:minorTickMark val="none"/>
+        <c:tickLblPos val="nextTo"/>
+        <c:spPr>
+          <a:noFill/>
+          <a:ln>
+            <a:noFill/>
+          </a:ln>
+          <a:effectLst/>
+        </c:spPr>
+        <c:txPr>
+          <a:bodyPr rot="-60000000" spcFirstLastPara="1" vertOverflow="ellipsis" vert="horz" wrap="square" anchor="ctr" anchorCtr="1"/>
+          <a:lstStyle/>
+          <a:p>
+            <a:pPr>
+              <a:defRPr sz="1000" b="0" i="0" u="none" strike="noStrike" kern="1200" baseline="0">
+                <a:solidFill>
+                  <a:schemeClr val="dk1">
+                    <a:lumMod val="65000"/>
+                    <a:lumOff val="35000"/>
+                  </a:schemeClr>
+                </a:solidFill>
+                <a:latin typeface="+mn-lt"/>
+                <a:ea typeface="+mn-ea"/>
+                <a:cs typeface="+mn-cs"/>
+              </a:defRPr>
+            </a:pPr>
+            <a:endParaRPr lang="ko-KR"/>
+          </a:p>
+        </c:txPr>
+        <c:crossAx val="1790661103"/>
+        <c:crosses val="autoZero"/>
+        <c:crossBetween val="between"/>
+        <c:majorUnit val="1"/>
+      </c:valAx>
+      <c:spPr>
+        <a:noFill/>
+        <a:ln>
+          <a:noFill/>
+        </a:ln>
+        <a:effectLst/>
+      </c:spPr>
+    </c:plotArea>
+    <c:plotVisOnly val="1"/>
+    <c:dispBlanksAs val="gap"/>
+    <c:showDLblsOverMax val="0"/>
+    <c:extLst>
+      <c:ext xmlns:c16r3="http://schemas.microsoft.com/office/drawing/2017/03/chart" uri="{56B9EC1D-385E-4148-901F-78D8002777C0}">
+        <c16r3:dataDisplayOptions16>
+          <c16r3:dispNaAsBlank val="1"/>
+        </c16r3:dataDisplayOptions16>
+      </c:ext>
+    </c:extLst>
+  </c:chart>
+  <c:spPr>
+    <a:noFill/>
+    <a:ln w="6350" cap="flat" cmpd="sng" algn="ctr">
+      <a:solidFill>
+        <a:schemeClr val="dk1">
+          <a:lumMod val="15000"/>
+          <a:lumOff val="85000"/>
+        </a:schemeClr>
+      </a:solidFill>
+      <a:round/>
+    </a:ln>
+    <a:effectLst/>
+  </c:spPr>
+  <c:txPr>
+    <a:bodyPr/>
+    <a:lstStyle/>
+    <a:p>
+      <a:pPr>
+        <a:defRPr/>
+      </a:pPr>
+      <a:endParaRPr lang="ko-KR"/>
+    </a:p>
+  </c:txPr>
+  <c:externalData r:id="rId3">
+    <c:autoUpdate val="0"/>
+  </c:externalData>
+</c:chartSpace>
+</file>
+
 <file path=ppt/charts/colors1.xml><?xml version="1.0" encoding="utf-8"?>
 <cs:colorStyle xmlns:cs="http://schemas.microsoft.com/office/drawing/2012/chartStyle" xmlns:a="http://schemas.openxmlformats.org/drawingml/2006/main" meth="cycle" id="10">
   <a:schemeClr val="accent1"/>
@@ -1137,6 +2031,86 @@
 </cs:colorStyle>
 </file>
 
+<file path=ppt/charts/colors3.xml><?xml version="1.0" encoding="utf-8"?>
+<cs:colorStyle xmlns:cs="http://schemas.microsoft.com/office/drawing/2012/chartStyle" xmlns:a="http://schemas.openxmlformats.org/drawingml/2006/main" meth="cycle" id="10">
+  <a:schemeClr val="accent1"/>
+  <a:schemeClr val="accent2"/>
+  <a:schemeClr val="accent3"/>
+  <a:schemeClr val="accent4"/>
+  <a:schemeClr val="accent5"/>
+  <a:schemeClr val="accent6"/>
+  <cs:variation/>
+  <cs:variation>
+    <a:lumMod val="60000"/>
+  </cs:variation>
+  <cs:variation>
+    <a:lumMod val="80000"/>
+    <a:lumOff val="20000"/>
+  </cs:variation>
+  <cs:variation>
+    <a:lumMod val="80000"/>
+  </cs:variation>
+  <cs:variation>
+    <a:lumMod val="60000"/>
+    <a:lumOff val="40000"/>
+  </cs:variation>
+  <cs:variation>
+    <a:lumMod val="50000"/>
+  </cs:variation>
+  <cs:variation>
+    <a:lumMod val="70000"/>
+    <a:lumOff val="30000"/>
+  </cs:variation>
+  <cs:variation>
+    <a:lumMod val="70000"/>
+  </cs:variation>
+  <cs:variation>
+    <a:lumMod val="50000"/>
+    <a:lumOff val="50000"/>
+  </cs:variation>
+</cs:colorStyle>
+</file>
+
+<file path=ppt/charts/colors4.xml><?xml version="1.0" encoding="utf-8"?>
+<cs:colorStyle xmlns:cs="http://schemas.microsoft.com/office/drawing/2012/chartStyle" xmlns:a="http://schemas.openxmlformats.org/drawingml/2006/main" meth="cycle" id="10">
+  <a:schemeClr val="accent1"/>
+  <a:schemeClr val="accent2"/>
+  <a:schemeClr val="accent3"/>
+  <a:schemeClr val="accent4"/>
+  <a:schemeClr val="accent5"/>
+  <a:schemeClr val="accent6"/>
+  <cs:variation/>
+  <cs:variation>
+    <a:lumMod val="60000"/>
+  </cs:variation>
+  <cs:variation>
+    <a:lumMod val="80000"/>
+    <a:lumOff val="20000"/>
+  </cs:variation>
+  <cs:variation>
+    <a:lumMod val="80000"/>
+  </cs:variation>
+  <cs:variation>
+    <a:lumMod val="60000"/>
+    <a:lumOff val="40000"/>
+  </cs:variation>
+  <cs:variation>
+    <a:lumMod val="50000"/>
+  </cs:variation>
+  <cs:variation>
+    <a:lumMod val="70000"/>
+    <a:lumOff val="30000"/>
+  </cs:variation>
+  <cs:variation>
+    <a:lumMod val="70000"/>
+  </cs:variation>
+  <cs:variation>
+    <a:lumMod val="50000"/>
+    <a:lumOff val="50000"/>
+  </cs:variation>
+</cs:colorStyle>
+</file>
+
 <file path=ppt/charts/style1.xml><?xml version="1.0" encoding="utf-8"?>
 <cs:chartStyle xmlns:cs="http://schemas.microsoft.com/office/drawing/2012/chartStyle" xmlns:a="http://schemas.openxmlformats.org/drawingml/2006/main" id="208">
   <cs:axisTitle>
@@ -1687,6 +2661,1104 @@
 </file>
 
 <file path=ppt/charts/style2.xml><?xml version="1.0" encoding="utf-8"?>
+<cs:chartStyle xmlns:cs="http://schemas.microsoft.com/office/drawing/2012/chartStyle" xmlns:a="http://schemas.openxmlformats.org/drawingml/2006/main" id="208">
+  <cs:axisTitle>
+    <cs:lnRef idx="0"/>
+    <cs:fillRef idx="0"/>
+    <cs:effectRef idx="0"/>
+    <cs:fontRef idx="minor">
+      <a:schemeClr val="dk1">
+        <a:lumMod val="65000"/>
+        <a:lumOff val="35000"/>
+      </a:schemeClr>
+    </cs:fontRef>
+    <cs:defRPr sz="1197" b="1" kern="1200"/>
+  </cs:axisTitle>
+  <cs:categoryAxis>
+    <cs:lnRef idx="0"/>
+    <cs:fillRef idx="0"/>
+    <cs:effectRef idx="0"/>
+    <cs:fontRef idx="minor">
+      <a:schemeClr val="dk1">
+        <a:lumMod val="65000"/>
+        <a:lumOff val="35000"/>
+      </a:schemeClr>
+    </cs:fontRef>
+    <cs:spPr>
+      <a:ln w="9525" cap="flat" cmpd="sng" algn="ctr">
+        <a:solidFill>
+          <a:schemeClr val="dk1">
+            <a:lumMod val="15000"/>
+            <a:lumOff val="85000"/>
+          </a:schemeClr>
+        </a:solidFill>
+        <a:round/>
+      </a:ln>
+    </cs:spPr>
+    <cs:defRPr sz="1197" kern="1200" cap="none" spc="0" normalizeH="0" baseline="0"/>
+  </cs:categoryAxis>
+  <cs:chartArea>
+    <cs:lnRef idx="0"/>
+    <cs:fillRef idx="0"/>
+    <cs:effectRef idx="0"/>
+    <cs:fontRef idx="minor">
+      <a:schemeClr val="dk1"/>
+    </cs:fontRef>
+    <cs:spPr>
+      <a:solidFill>
+        <a:schemeClr val="lt1"/>
+      </a:solidFill>
+      <a:ln w="9525" cap="flat" cmpd="sng" algn="ctr">
+        <a:solidFill>
+          <a:schemeClr val="dk1">
+            <a:lumMod val="15000"/>
+            <a:lumOff val="85000"/>
+          </a:schemeClr>
+        </a:solidFill>
+        <a:round/>
+      </a:ln>
+    </cs:spPr>
+    <cs:defRPr sz="1197" kern="1200"/>
+  </cs:chartArea>
+  <cs:dataLabel>
+    <cs:lnRef idx="0"/>
+    <cs:fillRef idx="0"/>
+    <cs:effectRef idx="0"/>
+    <cs:fontRef idx="minor">
+      <a:schemeClr val="dk1">
+        <a:lumMod val="75000"/>
+        <a:lumOff val="25000"/>
+      </a:schemeClr>
+    </cs:fontRef>
+    <cs:defRPr sz="1197" kern="1200"/>
+  </cs:dataLabel>
+  <cs:dataLabelCallout>
+    <cs:lnRef idx="0"/>
+    <cs:fillRef idx="0"/>
+    <cs:effectRef idx="0"/>
+    <cs:fontRef idx="minor">
+      <a:schemeClr val="dk1">
+        <a:lumMod val="65000"/>
+        <a:lumOff val="35000"/>
+      </a:schemeClr>
+    </cs:fontRef>
+    <cs:spPr>
+      <a:solidFill>
+        <a:schemeClr val="lt1"/>
+      </a:solidFill>
+      <a:ln>
+        <a:solidFill>
+          <a:schemeClr val="dk1">
+            <a:lumMod val="25000"/>
+            <a:lumOff val="75000"/>
+          </a:schemeClr>
+        </a:solidFill>
+      </a:ln>
+    </cs:spPr>
+    <cs:defRPr sz="1197" kern="1200"/>
+    <cs:bodyPr rot="0" spcFirstLastPara="1" vertOverflow="clip" horzOverflow="clip" vert="horz" wrap="square" lIns="36576" tIns="18288" rIns="36576" bIns="18288" anchor="ctr" anchorCtr="1">
+      <a:spAutoFit/>
+    </cs:bodyPr>
+  </cs:dataLabelCallout>
+  <cs:dataPoint>
+    <cs:lnRef idx="0"/>
+    <cs:fillRef idx="0">
+      <cs:styleClr val="auto"/>
+    </cs:fillRef>
+    <cs:effectRef idx="0"/>
+    <cs:fontRef idx="minor">
+      <a:schemeClr val="dk1"/>
+    </cs:fontRef>
+    <cs:spPr>
+      <a:solidFill>
+        <a:schemeClr val="phClr"/>
+      </a:solidFill>
+    </cs:spPr>
+  </cs:dataPoint>
+  <cs:dataPoint3D>
+    <cs:lnRef idx="0"/>
+    <cs:fillRef idx="0">
+      <cs:styleClr val="auto"/>
+    </cs:fillRef>
+    <cs:effectRef idx="0"/>
+    <cs:fontRef idx="minor">
+      <a:schemeClr val="dk1"/>
+    </cs:fontRef>
+    <cs:spPr>
+      <a:solidFill>
+        <a:schemeClr val="phClr"/>
+      </a:solidFill>
+    </cs:spPr>
+  </cs:dataPoint3D>
+  <cs:dataPointLine>
+    <cs:lnRef idx="0">
+      <cs:styleClr val="auto"/>
+    </cs:lnRef>
+    <cs:fillRef idx="0"/>
+    <cs:effectRef idx="0"/>
+    <cs:fontRef idx="minor">
+      <a:schemeClr val="dk1"/>
+    </cs:fontRef>
+    <cs:spPr>
+      <a:ln w="22225" cap="rnd">
+        <a:solidFill>
+          <a:schemeClr val="phClr"/>
+        </a:solidFill>
+        <a:round/>
+      </a:ln>
+    </cs:spPr>
+  </cs:dataPointLine>
+  <cs:dataPointMarker>
+    <cs:lnRef idx="0">
+      <cs:styleClr val="auto"/>
+    </cs:lnRef>
+    <cs:fillRef idx="0">
+      <cs:styleClr val="auto"/>
+    </cs:fillRef>
+    <cs:effectRef idx="0"/>
+    <cs:fontRef idx="minor">
+      <a:schemeClr val="dk1"/>
+    </cs:fontRef>
+    <cs:spPr>
+      <a:solidFill>
+        <a:schemeClr val="lt1"/>
+      </a:solidFill>
+      <a:ln w="15875">
+        <a:solidFill>
+          <a:schemeClr val="phClr"/>
+        </a:solidFill>
+        <a:round/>
+      </a:ln>
+    </cs:spPr>
+  </cs:dataPointMarker>
+  <cs:dataPointMarkerLayout symbol="circle" size="6"/>
+  <cs:dataPointWireframe>
+    <cs:lnRef idx="0">
+      <cs:styleClr val="auto"/>
+    </cs:lnRef>
+    <cs:fillRef idx="0"/>
+    <cs:effectRef idx="0"/>
+    <cs:fontRef idx="minor">
+      <a:schemeClr val="dk1"/>
+    </cs:fontRef>
+    <cs:spPr>
+      <a:ln w="9525" cap="rnd">
+        <a:solidFill>
+          <a:schemeClr val="phClr"/>
+        </a:solidFill>
+        <a:round/>
+      </a:ln>
+    </cs:spPr>
+  </cs:dataPointWireframe>
+  <cs:dataTable>
+    <cs:lnRef idx="0"/>
+    <cs:fillRef idx="0"/>
+    <cs:effectRef idx="0"/>
+    <cs:fontRef idx="minor">
+      <a:schemeClr val="dk1">
+        <a:lumMod val="65000"/>
+        <a:lumOff val="35000"/>
+      </a:schemeClr>
+    </cs:fontRef>
+    <cs:spPr>
+      <a:ln w="9525" cap="flat" cmpd="sng" algn="ctr">
+        <a:solidFill>
+          <a:schemeClr val="dk1">
+            <a:lumMod val="15000"/>
+            <a:lumOff val="85000"/>
+          </a:schemeClr>
+        </a:solidFill>
+        <a:round/>
+      </a:ln>
+    </cs:spPr>
+    <cs:defRPr sz="1064" kern="1200"/>
+  </cs:dataTable>
+  <cs:downBar>
+    <cs:lnRef idx="0"/>
+    <cs:fillRef idx="0"/>
+    <cs:effectRef idx="0"/>
+    <cs:fontRef idx="minor">
+      <a:schemeClr val="dk1"/>
+    </cs:fontRef>
+    <cs:spPr>
+      <a:solidFill>
+        <a:schemeClr val="dk1">
+          <a:lumMod val="75000"/>
+          <a:lumOff val="25000"/>
+        </a:schemeClr>
+      </a:solidFill>
+      <a:ln w="9525" cap="flat" cmpd="sng" algn="ctr">
+        <a:solidFill>
+          <a:schemeClr val="dk1">
+            <a:lumMod val="50000"/>
+            <a:lumOff val="50000"/>
+          </a:schemeClr>
+        </a:solidFill>
+        <a:round/>
+      </a:ln>
+    </cs:spPr>
+  </cs:downBar>
+  <cs:dropLine>
+    <cs:lnRef idx="0"/>
+    <cs:fillRef idx="0"/>
+    <cs:effectRef idx="0"/>
+    <cs:fontRef idx="minor">
+      <a:schemeClr val="dk1"/>
+    </cs:fontRef>
+    <cs:spPr>
+      <a:ln w="9525" cap="flat" cmpd="sng" algn="ctr">
+        <a:solidFill>
+          <a:schemeClr val="dk1">
+            <a:lumMod val="35000"/>
+            <a:lumOff val="65000"/>
+          </a:schemeClr>
+        </a:solidFill>
+        <a:round/>
+      </a:ln>
+    </cs:spPr>
+  </cs:dropLine>
+  <cs:errorBar>
+    <cs:lnRef idx="0"/>
+    <cs:fillRef idx="0"/>
+    <cs:effectRef idx="0"/>
+    <cs:fontRef idx="minor">
+      <a:schemeClr val="dk1"/>
+    </cs:fontRef>
+    <cs:spPr>
+      <a:ln w="9525" cap="flat" cmpd="sng" algn="ctr">
+        <a:solidFill>
+          <a:schemeClr val="dk1">
+            <a:lumMod val="50000"/>
+            <a:lumOff val="50000"/>
+          </a:schemeClr>
+        </a:solidFill>
+        <a:round/>
+      </a:ln>
+    </cs:spPr>
+  </cs:errorBar>
+  <cs:floor>
+    <cs:lnRef idx="0"/>
+    <cs:fillRef idx="0"/>
+    <cs:effectRef idx="0"/>
+    <cs:fontRef idx="minor">
+      <a:schemeClr val="dk1"/>
+    </cs:fontRef>
+    <cs:spPr>
+      <a:pattFill prst="ltDnDiag">
+        <a:fgClr>
+          <a:schemeClr val="dk1">
+            <a:lumMod val="15000"/>
+            <a:lumOff val="85000"/>
+          </a:schemeClr>
+        </a:fgClr>
+        <a:bgClr>
+          <a:schemeClr val="lt1"/>
+        </a:bgClr>
+      </a:pattFill>
+    </cs:spPr>
+  </cs:floor>
+  <cs:gridlineMajor>
+    <cs:lnRef idx="0"/>
+    <cs:fillRef idx="0"/>
+    <cs:effectRef idx="0"/>
+    <cs:fontRef idx="minor">
+      <a:schemeClr val="dk1"/>
+    </cs:fontRef>
+    <cs:spPr>
+      <a:ln w="9525" cap="flat" cmpd="sng" algn="ctr">
+        <a:solidFill>
+          <a:schemeClr val="dk1">
+            <a:lumMod val="15000"/>
+            <a:lumOff val="85000"/>
+          </a:schemeClr>
+        </a:solidFill>
+        <a:round/>
+      </a:ln>
+    </cs:spPr>
+  </cs:gridlineMajor>
+  <cs:gridlineMinor>
+    <cs:lnRef idx="0"/>
+    <cs:fillRef idx="0"/>
+    <cs:effectRef idx="0"/>
+    <cs:fontRef idx="minor">
+      <a:schemeClr val="dk1"/>
+    </cs:fontRef>
+    <cs:spPr>
+      <a:ln w="9525" cap="flat" cmpd="sng" algn="ctr">
+        <a:solidFill>
+          <a:schemeClr val="dk1">
+            <a:lumMod val="5000"/>
+            <a:lumOff val="95000"/>
+          </a:schemeClr>
+        </a:solidFill>
+        <a:round/>
+      </a:ln>
+    </cs:spPr>
+  </cs:gridlineMinor>
+  <cs:hiLoLine>
+    <cs:lnRef idx="0"/>
+    <cs:fillRef idx="0"/>
+    <cs:effectRef idx="0"/>
+    <cs:fontRef idx="minor">
+      <a:schemeClr val="dk1"/>
+    </cs:fontRef>
+    <cs:spPr>
+      <a:ln w="9525" cap="flat" cmpd="sng" algn="ctr">
+        <a:solidFill>
+          <a:schemeClr val="dk1">
+            <a:lumMod val="35000"/>
+            <a:lumOff val="65000"/>
+          </a:schemeClr>
+        </a:solidFill>
+        <a:round/>
+      </a:ln>
+    </cs:spPr>
+  </cs:hiLoLine>
+  <cs:leaderLine>
+    <cs:lnRef idx="0"/>
+    <cs:fillRef idx="0"/>
+    <cs:effectRef idx="0"/>
+    <cs:fontRef idx="minor">
+      <a:schemeClr val="dk1"/>
+    </cs:fontRef>
+    <cs:spPr>
+      <a:ln w="9525" cap="flat" cmpd="sng" algn="ctr">
+        <a:solidFill>
+          <a:schemeClr val="dk1">
+            <a:lumMod val="35000"/>
+            <a:lumOff val="65000"/>
+          </a:schemeClr>
+        </a:solidFill>
+        <a:round/>
+      </a:ln>
+    </cs:spPr>
+  </cs:leaderLine>
+  <cs:legend>
+    <cs:lnRef idx="0"/>
+    <cs:fillRef idx="0"/>
+    <cs:effectRef idx="0"/>
+    <cs:fontRef idx="minor">
+      <a:schemeClr val="dk1">
+        <a:lumMod val="65000"/>
+        <a:lumOff val="35000"/>
+      </a:schemeClr>
+    </cs:fontRef>
+    <cs:defRPr sz="1197" kern="1200"/>
+  </cs:legend>
+  <cs:plotArea>
+    <cs:lnRef idx="0"/>
+    <cs:fillRef idx="0"/>
+    <cs:effectRef idx="0"/>
+    <cs:fontRef idx="minor">
+      <a:schemeClr val="dk1"/>
+    </cs:fontRef>
+    <cs:spPr>
+      <a:pattFill prst="ltDnDiag">
+        <a:fgClr>
+          <a:schemeClr val="dk1">
+            <a:lumMod val="15000"/>
+            <a:lumOff val="85000"/>
+          </a:schemeClr>
+        </a:fgClr>
+        <a:bgClr>
+          <a:schemeClr val="lt1"/>
+        </a:bgClr>
+      </a:pattFill>
+    </cs:spPr>
+  </cs:plotArea>
+  <cs:plotArea3D>
+    <cs:lnRef idx="0"/>
+    <cs:fillRef idx="0"/>
+    <cs:effectRef idx="0"/>
+    <cs:fontRef idx="minor">
+      <a:schemeClr val="dk1"/>
+    </cs:fontRef>
+    <cs:spPr>
+      <a:solidFill>
+        <a:schemeClr val="lt1"/>
+      </a:solidFill>
+    </cs:spPr>
+  </cs:plotArea3D>
+  <cs:seriesAxis>
+    <cs:lnRef idx="0"/>
+    <cs:fillRef idx="0"/>
+    <cs:effectRef idx="0"/>
+    <cs:fontRef idx="minor">
+      <a:schemeClr val="dk1">
+        <a:lumMod val="65000"/>
+        <a:lumOff val="35000"/>
+      </a:schemeClr>
+    </cs:fontRef>
+    <cs:defRPr sz="1197" kern="1200"/>
+  </cs:seriesAxis>
+  <cs:seriesLine>
+    <cs:lnRef idx="0"/>
+    <cs:fillRef idx="0"/>
+    <cs:effectRef idx="0"/>
+    <cs:fontRef idx="minor">
+      <a:schemeClr val="dk1"/>
+    </cs:fontRef>
+    <cs:spPr>
+      <a:ln w="9525" cap="flat" cmpd="sng" algn="ctr">
+        <a:solidFill>
+          <a:schemeClr val="dk1">
+            <a:lumMod val="35000"/>
+            <a:lumOff val="65000"/>
+          </a:schemeClr>
+        </a:solidFill>
+        <a:round/>
+      </a:ln>
+    </cs:spPr>
+  </cs:seriesLine>
+  <cs:title>
+    <cs:lnRef idx="0"/>
+    <cs:fillRef idx="0"/>
+    <cs:effectRef idx="0"/>
+    <cs:fontRef idx="major">
+      <a:schemeClr val="dk1">
+        <a:lumMod val="50000"/>
+        <a:lumOff val="50000"/>
+      </a:schemeClr>
+    </cs:fontRef>
+    <cs:defRPr sz="2128" b="1" kern="1200" cap="none" spc="0" normalizeH="0" baseline="0"/>
+  </cs:title>
+  <cs:trendline>
+    <cs:lnRef idx="0">
+      <cs:styleClr val="auto"/>
+    </cs:lnRef>
+    <cs:fillRef idx="0"/>
+    <cs:effectRef idx="0"/>
+    <cs:fontRef idx="minor">
+      <a:schemeClr val="dk1"/>
+    </cs:fontRef>
+    <cs:spPr>
+      <a:ln w="19050" cap="rnd">
+        <a:solidFill>
+          <a:schemeClr val="phClr"/>
+        </a:solidFill>
+      </a:ln>
+    </cs:spPr>
+  </cs:trendline>
+  <cs:trendlineLabel>
+    <cs:lnRef idx="0"/>
+    <cs:fillRef idx="0"/>
+    <cs:effectRef idx="0"/>
+    <cs:fontRef idx="minor">
+      <a:schemeClr val="dk1">
+        <a:lumMod val="65000"/>
+        <a:lumOff val="35000"/>
+      </a:schemeClr>
+    </cs:fontRef>
+    <cs:defRPr sz="1197" kern="1200"/>
+  </cs:trendlineLabel>
+  <cs:upBar>
+    <cs:lnRef idx="0"/>
+    <cs:fillRef idx="0"/>
+    <cs:effectRef idx="0"/>
+    <cs:fontRef idx="minor">
+      <a:schemeClr val="dk1"/>
+    </cs:fontRef>
+    <cs:spPr>
+      <a:solidFill>
+        <a:schemeClr val="lt1"/>
+      </a:solidFill>
+      <a:ln w="9525" cap="flat" cmpd="sng" algn="ctr">
+        <a:solidFill>
+          <a:schemeClr val="dk1">
+            <a:lumMod val="50000"/>
+            <a:lumOff val="50000"/>
+          </a:schemeClr>
+        </a:solidFill>
+        <a:round/>
+      </a:ln>
+    </cs:spPr>
+  </cs:upBar>
+  <cs:valueAxis>
+    <cs:lnRef idx="0"/>
+    <cs:fillRef idx="0"/>
+    <cs:effectRef idx="0"/>
+    <cs:fontRef idx="minor">
+      <a:schemeClr val="dk1">
+        <a:lumMod val="65000"/>
+        <a:lumOff val="35000"/>
+      </a:schemeClr>
+    </cs:fontRef>
+    <cs:defRPr sz="1197" kern="1200"/>
+  </cs:valueAxis>
+  <cs:wall>
+    <cs:lnRef idx="0"/>
+    <cs:fillRef idx="0"/>
+    <cs:effectRef idx="0"/>
+    <cs:fontRef idx="minor">
+      <a:schemeClr val="dk1"/>
+    </cs:fontRef>
+    <cs:spPr>
+      <a:pattFill prst="ltDnDiag">
+        <a:fgClr>
+          <a:schemeClr val="dk1">
+            <a:lumMod val="15000"/>
+            <a:lumOff val="85000"/>
+          </a:schemeClr>
+        </a:fgClr>
+        <a:bgClr>
+          <a:schemeClr val="lt1"/>
+        </a:bgClr>
+      </a:pattFill>
+    </cs:spPr>
+  </cs:wall>
+</cs:chartStyle>
+</file>
+
+<file path=ppt/charts/style3.xml><?xml version="1.0" encoding="utf-8"?>
+<cs:chartStyle xmlns:cs="http://schemas.microsoft.com/office/drawing/2012/chartStyle" xmlns:a="http://schemas.openxmlformats.org/drawingml/2006/main" id="208">
+  <cs:axisTitle>
+    <cs:lnRef idx="0"/>
+    <cs:fillRef idx="0"/>
+    <cs:effectRef idx="0"/>
+    <cs:fontRef idx="minor">
+      <a:schemeClr val="dk1">
+        <a:lumMod val="65000"/>
+        <a:lumOff val="35000"/>
+      </a:schemeClr>
+    </cs:fontRef>
+    <cs:defRPr sz="1197" b="1" kern="1200"/>
+  </cs:axisTitle>
+  <cs:categoryAxis>
+    <cs:lnRef idx="0"/>
+    <cs:fillRef idx="0"/>
+    <cs:effectRef idx="0"/>
+    <cs:fontRef idx="minor">
+      <a:schemeClr val="dk1">
+        <a:lumMod val="65000"/>
+        <a:lumOff val="35000"/>
+      </a:schemeClr>
+    </cs:fontRef>
+    <cs:spPr>
+      <a:ln w="9525" cap="flat" cmpd="sng" algn="ctr">
+        <a:solidFill>
+          <a:schemeClr val="dk1">
+            <a:lumMod val="15000"/>
+            <a:lumOff val="85000"/>
+          </a:schemeClr>
+        </a:solidFill>
+        <a:round/>
+      </a:ln>
+    </cs:spPr>
+    <cs:defRPr sz="1197" kern="1200" cap="none" spc="0" normalizeH="0" baseline="0"/>
+  </cs:categoryAxis>
+  <cs:chartArea>
+    <cs:lnRef idx="0"/>
+    <cs:fillRef idx="0"/>
+    <cs:effectRef idx="0"/>
+    <cs:fontRef idx="minor">
+      <a:schemeClr val="dk1"/>
+    </cs:fontRef>
+    <cs:spPr>
+      <a:solidFill>
+        <a:schemeClr val="lt1"/>
+      </a:solidFill>
+      <a:ln w="9525" cap="flat" cmpd="sng" algn="ctr">
+        <a:solidFill>
+          <a:schemeClr val="dk1">
+            <a:lumMod val="15000"/>
+            <a:lumOff val="85000"/>
+          </a:schemeClr>
+        </a:solidFill>
+        <a:round/>
+      </a:ln>
+    </cs:spPr>
+    <cs:defRPr sz="1197" kern="1200"/>
+  </cs:chartArea>
+  <cs:dataLabel>
+    <cs:lnRef idx="0"/>
+    <cs:fillRef idx="0"/>
+    <cs:effectRef idx="0"/>
+    <cs:fontRef idx="minor">
+      <a:schemeClr val="dk1">
+        <a:lumMod val="75000"/>
+        <a:lumOff val="25000"/>
+      </a:schemeClr>
+    </cs:fontRef>
+    <cs:defRPr sz="1197" kern="1200"/>
+  </cs:dataLabel>
+  <cs:dataLabelCallout>
+    <cs:lnRef idx="0"/>
+    <cs:fillRef idx="0"/>
+    <cs:effectRef idx="0"/>
+    <cs:fontRef idx="minor">
+      <a:schemeClr val="dk1">
+        <a:lumMod val="65000"/>
+        <a:lumOff val="35000"/>
+      </a:schemeClr>
+    </cs:fontRef>
+    <cs:spPr>
+      <a:solidFill>
+        <a:schemeClr val="lt1"/>
+      </a:solidFill>
+      <a:ln>
+        <a:solidFill>
+          <a:schemeClr val="dk1">
+            <a:lumMod val="25000"/>
+            <a:lumOff val="75000"/>
+          </a:schemeClr>
+        </a:solidFill>
+      </a:ln>
+    </cs:spPr>
+    <cs:defRPr sz="1197" kern="1200"/>
+    <cs:bodyPr rot="0" spcFirstLastPara="1" vertOverflow="clip" horzOverflow="clip" vert="horz" wrap="square" lIns="36576" tIns="18288" rIns="36576" bIns="18288" anchor="ctr" anchorCtr="1">
+      <a:spAutoFit/>
+    </cs:bodyPr>
+  </cs:dataLabelCallout>
+  <cs:dataPoint>
+    <cs:lnRef idx="0"/>
+    <cs:fillRef idx="0">
+      <cs:styleClr val="auto"/>
+    </cs:fillRef>
+    <cs:effectRef idx="0"/>
+    <cs:fontRef idx="minor">
+      <a:schemeClr val="dk1"/>
+    </cs:fontRef>
+    <cs:spPr>
+      <a:solidFill>
+        <a:schemeClr val="phClr"/>
+      </a:solidFill>
+    </cs:spPr>
+  </cs:dataPoint>
+  <cs:dataPoint3D>
+    <cs:lnRef idx="0"/>
+    <cs:fillRef idx="0">
+      <cs:styleClr val="auto"/>
+    </cs:fillRef>
+    <cs:effectRef idx="0"/>
+    <cs:fontRef idx="minor">
+      <a:schemeClr val="dk1"/>
+    </cs:fontRef>
+    <cs:spPr>
+      <a:solidFill>
+        <a:schemeClr val="phClr"/>
+      </a:solidFill>
+    </cs:spPr>
+  </cs:dataPoint3D>
+  <cs:dataPointLine>
+    <cs:lnRef idx="0">
+      <cs:styleClr val="auto"/>
+    </cs:lnRef>
+    <cs:fillRef idx="0"/>
+    <cs:effectRef idx="0"/>
+    <cs:fontRef idx="minor">
+      <a:schemeClr val="dk1"/>
+    </cs:fontRef>
+    <cs:spPr>
+      <a:ln w="22225" cap="rnd">
+        <a:solidFill>
+          <a:schemeClr val="phClr"/>
+        </a:solidFill>
+        <a:round/>
+      </a:ln>
+    </cs:spPr>
+  </cs:dataPointLine>
+  <cs:dataPointMarker>
+    <cs:lnRef idx="0">
+      <cs:styleClr val="auto"/>
+    </cs:lnRef>
+    <cs:fillRef idx="0">
+      <cs:styleClr val="auto"/>
+    </cs:fillRef>
+    <cs:effectRef idx="0"/>
+    <cs:fontRef idx="minor">
+      <a:schemeClr val="dk1"/>
+    </cs:fontRef>
+    <cs:spPr>
+      <a:solidFill>
+        <a:schemeClr val="lt1"/>
+      </a:solidFill>
+      <a:ln w="15875">
+        <a:solidFill>
+          <a:schemeClr val="phClr"/>
+        </a:solidFill>
+        <a:round/>
+      </a:ln>
+    </cs:spPr>
+  </cs:dataPointMarker>
+  <cs:dataPointMarkerLayout symbol="circle" size="6"/>
+  <cs:dataPointWireframe>
+    <cs:lnRef idx="0">
+      <cs:styleClr val="auto"/>
+    </cs:lnRef>
+    <cs:fillRef idx="0"/>
+    <cs:effectRef idx="0"/>
+    <cs:fontRef idx="minor">
+      <a:schemeClr val="dk1"/>
+    </cs:fontRef>
+    <cs:spPr>
+      <a:ln w="9525" cap="rnd">
+        <a:solidFill>
+          <a:schemeClr val="phClr"/>
+        </a:solidFill>
+        <a:round/>
+      </a:ln>
+    </cs:spPr>
+  </cs:dataPointWireframe>
+  <cs:dataTable>
+    <cs:lnRef idx="0"/>
+    <cs:fillRef idx="0"/>
+    <cs:effectRef idx="0"/>
+    <cs:fontRef idx="minor">
+      <a:schemeClr val="dk1">
+        <a:lumMod val="65000"/>
+        <a:lumOff val="35000"/>
+      </a:schemeClr>
+    </cs:fontRef>
+    <cs:spPr>
+      <a:ln w="9525" cap="flat" cmpd="sng" algn="ctr">
+        <a:solidFill>
+          <a:schemeClr val="dk1">
+            <a:lumMod val="15000"/>
+            <a:lumOff val="85000"/>
+          </a:schemeClr>
+        </a:solidFill>
+        <a:round/>
+      </a:ln>
+    </cs:spPr>
+    <cs:defRPr sz="1064" kern="1200"/>
+  </cs:dataTable>
+  <cs:downBar>
+    <cs:lnRef idx="0"/>
+    <cs:fillRef idx="0"/>
+    <cs:effectRef idx="0"/>
+    <cs:fontRef idx="minor">
+      <a:schemeClr val="dk1"/>
+    </cs:fontRef>
+    <cs:spPr>
+      <a:solidFill>
+        <a:schemeClr val="dk1">
+          <a:lumMod val="75000"/>
+          <a:lumOff val="25000"/>
+        </a:schemeClr>
+      </a:solidFill>
+      <a:ln w="9525" cap="flat" cmpd="sng" algn="ctr">
+        <a:solidFill>
+          <a:schemeClr val="dk1">
+            <a:lumMod val="50000"/>
+            <a:lumOff val="50000"/>
+          </a:schemeClr>
+        </a:solidFill>
+        <a:round/>
+      </a:ln>
+    </cs:spPr>
+  </cs:downBar>
+  <cs:dropLine>
+    <cs:lnRef idx="0"/>
+    <cs:fillRef idx="0"/>
+    <cs:effectRef idx="0"/>
+    <cs:fontRef idx="minor">
+      <a:schemeClr val="dk1"/>
+    </cs:fontRef>
+    <cs:spPr>
+      <a:ln w="9525" cap="flat" cmpd="sng" algn="ctr">
+        <a:solidFill>
+          <a:schemeClr val="dk1">
+            <a:lumMod val="35000"/>
+            <a:lumOff val="65000"/>
+          </a:schemeClr>
+        </a:solidFill>
+        <a:round/>
+      </a:ln>
+    </cs:spPr>
+  </cs:dropLine>
+  <cs:errorBar>
+    <cs:lnRef idx="0"/>
+    <cs:fillRef idx="0"/>
+    <cs:effectRef idx="0"/>
+    <cs:fontRef idx="minor">
+      <a:schemeClr val="dk1"/>
+    </cs:fontRef>
+    <cs:spPr>
+      <a:ln w="9525" cap="flat" cmpd="sng" algn="ctr">
+        <a:solidFill>
+          <a:schemeClr val="dk1">
+            <a:lumMod val="50000"/>
+            <a:lumOff val="50000"/>
+          </a:schemeClr>
+        </a:solidFill>
+        <a:round/>
+      </a:ln>
+    </cs:spPr>
+  </cs:errorBar>
+  <cs:floor>
+    <cs:lnRef idx="0"/>
+    <cs:fillRef idx="0"/>
+    <cs:effectRef idx="0"/>
+    <cs:fontRef idx="minor">
+      <a:schemeClr val="dk1"/>
+    </cs:fontRef>
+    <cs:spPr>
+      <a:pattFill prst="ltDnDiag">
+        <a:fgClr>
+          <a:schemeClr val="dk1">
+            <a:lumMod val="15000"/>
+            <a:lumOff val="85000"/>
+          </a:schemeClr>
+        </a:fgClr>
+        <a:bgClr>
+          <a:schemeClr val="lt1"/>
+        </a:bgClr>
+      </a:pattFill>
+    </cs:spPr>
+  </cs:floor>
+  <cs:gridlineMajor>
+    <cs:lnRef idx="0"/>
+    <cs:fillRef idx="0"/>
+    <cs:effectRef idx="0"/>
+    <cs:fontRef idx="minor">
+      <a:schemeClr val="dk1"/>
+    </cs:fontRef>
+    <cs:spPr>
+      <a:ln w="9525" cap="flat" cmpd="sng" algn="ctr">
+        <a:solidFill>
+          <a:schemeClr val="dk1">
+            <a:lumMod val="15000"/>
+            <a:lumOff val="85000"/>
+          </a:schemeClr>
+        </a:solidFill>
+        <a:round/>
+      </a:ln>
+    </cs:spPr>
+  </cs:gridlineMajor>
+  <cs:gridlineMinor>
+    <cs:lnRef idx="0"/>
+    <cs:fillRef idx="0"/>
+    <cs:effectRef idx="0"/>
+    <cs:fontRef idx="minor">
+      <a:schemeClr val="dk1"/>
+    </cs:fontRef>
+    <cs:spPr>
+      <a:ln w="9525" cap="flat" cmpd="sng" algn="ctr">
+        <a:solidFill>
+          <a:schemeClr val="dk1">
+            <a:lumMod val="5000"/>
+            <a:lumOff val="95000"/>
+          </a:schemeClr>
+        </a:solidFill>
+        <a:round/>
+      </a:ln>
+    </cs:spPr>
+  </cs:gridlineMinor>
+  <cs:hiLoLine>
+    <cs:lnRef idx="0"/>
+    <cs:fillRef idx="0"/>
+    <cs:effectRef idx="0"/>
+    <cs:fontRef idx="minor">
+      <a:schemeClr val="dk1"/>
+    </cs:fontRef>
+    <cs:spPr>
+      <a:ln w="9525" cap="flat" cmpd="sng" algn="ctr">
+        <a:solidFill>
+          <a:schemeClr val="dk1">
+            <a:lumMod val="35000"/>
+            <a:lumOff val="65000"/>
+          </a:schemeClr>
+        </a:solidFill>
+        <a:round/>
+      </a:ln>
+    </cs:spPr>
+  </cs:hiLoLine>
+  <cs:leaderLine>
+    <cs:lnRef idx="0"/>
+    <cs:fillRef idx="0"/>
+    <cs:effectRef idx="0"/>
+    <cs:fontRef idx="minor">
+      <a:schemeClr val="dk1"/>
+    </cs:fontRef>
+    <cs:spPr>
+      <a:ln w="9525" cap="flat" cmpd="sng" algn="ctr">
+        <a:solidFill>
+          <a:schemeClr val="dk1">
+            <a:lumMod val="35000"/>
+            <a:lumOff val="65000"/>
+          </a:schemeClr>
+        </a:solidFill>
+        <a:round/>
+      </a:ln>
+    </cs:spPr>
+  </cs:leaderLine>
+  <cs:legend>
+    <cs:lnRef idx="0"/>
+    <cs:fillRef idx="0"/>
+    <cs:effectRef idx="0"/>
+    <cs:fontRef idx="minor">
+      <a:schemeClr val="dk1">
+        <a:lumMod val="65000"/>
+        <a:lumOff val="35000"/>
+      </a:schemeClr>
+    </cs:fontRef>
+    <cs:defRPr sz="1197" kern="1200"/>
+  </cs:legend>
+  <cs:plotArea>
+    <cs:lnRef idx="0"/>
+    <cs:fillRef idx="0"/>
+    <cs:effectRef idx="0"/>
+    <cs:fontRef idx="minor">
+      <a:schemeClr val="dk1"/>
+    </cs:fontRef>
+    <cs:spPr>
+      <a:pattFill prst="ltDnDiag">
+        <a:fgClr>
+          <a:schemeClr val="dk1">
+            <a:lumMod val="15000"/>
+            <a:lumOff val="85000"/>
+          </a:schemeClr>
+        </a:fgClr>
+        <a:bgClr>
+          <a:schemeClr val="lt1"/>
+        </a:bgClr>
+      </a:pattFill>
+    </cs:spPr>
+  </cs:plotArea>
+  <cs:plotArea3D>
+    <cs:lnRef idx="0"/>
+    <cs:fillRef idx="0"/>
+    <cs:effectRef idx="0"/>
+    <cs:fontRef idx="minor">
+      <a:schemeClr val="dk1"/>
+    </cs:fontRef>
+    <cs:spPr>
+      <a:solidFill>
+        <a:schemeClr val="lt1"/>
+      </a:solidFill>
+    </cs:spPr>
+  </cs:plotArea3D>
+  <cs:seriesAxis>
+    <cs:lnRef idx="0"/>
+    <cs:fillRef idx="0"/>
+    <cs:effectRef idx="0"/>
+    <cs:fontRef idx="minor">
+      <a:schemeClr val="dk1">
+        <a:lumMod val="65000"/>
+        <a:lumOff val="35000"/>
+      </a:schemeClr>
+    </cs:fontRef>
+    <cs:defRPr sz="1197" kern="1200"/>
+  </cs:seriesAxis>
+  <cs:seriesLine>
+    <cs:lnRef idx="0"/>
+    <cs:fillRef idx="0"/>
+    <cs:effectRef idx="0"/>
+    <cs:fontRef idx="minor">
+      <a:schemeClr val="dk1"/>
+    </cs:fontRef>
+    <cs:spPr>
+      <a:ln w="9525" cap="flat" cmpd="sng" algn="ctr">
+        <a:solidFill>
+          <a:schemeClr val="dk1">
+            <a:lumMod val="35000"/>
+            <a:lumOff val="65000"/>
+          </a:schemeClr>
+        </a:solidFill>
+        <a:round/>
+      </a:ln>
+    </cs:spPr>
+  </cs:seriesLine>
+  <cs:title>
+    <cs:lnRef idx="0"/>
+    <cs:fillRef idx="0"/>
+    <cs:effectRef idx="0"/>
+    <cs:fontRef idx="major">
+      <a:schemeClr val="dk1">
+        <a:lumMod val="50000"/>
+        <a:lumOff val="50000"/>
+      </a:schemeClr>
+    </cs:fontRef>
+    <cs:defRPr sz="2128" b="1" kern="1200" cap="none" spc="0" normalizeH="0" baseline="0"/>
+  </cs:title>
+  <cs:trendline>
+    <cs:lnRef idx="0">
+      <cs:styleClr val="auto"/>
+    </cs:lnRef>
+    <cs:fillRef idx="0"/>
+    <cs:effectRef idx="0"/>
+    <cs:fontRef idx="minor">
+      <a:schemeClr val="dk1"/>
+    </cs:fontRef>
+    <cs:spPr>
+      <a:ln w="19050" cap="rnd">
+        <a:solidFill>
+          <a:schemeClr val="phClr"/>
+        </a:solidFill>
+      </a:ln>
+    </cs:spPr>
+  </cs:trendline>
+  <cs:trendlineLabel>
+    <cs:lnRef idx="0"/>
+    <cs:fillRef idx="0"/>
+    <cs:effectRef idx="0"/>
+    <cs:fontRef idx="minor">
+      <a:schemeClr val="dk1">
+        <a:lumMod val="65000"/>
+        <a:lumOff val="35000"/>
+      </a:schemeClr>
+    </cs:fontRef>
+    <cs:defRPr sz="1197" kern="1200"/>
+  </cs:trendlineLabel>
+  <cs:upBar>
+    <cs:lnRef idx="0"/>
+    <cs:fillRef idx="0"/>
+    <cs:effectRef idx="0"/>
+    <cs:fontRef idx="minor">
+      <a:schemeClr val="dk1"/>
+    </cs:fontRef>
+    <cs:spPr>
+      <a:solidFill>
+        <a:schemeClr val="lt1"/>
+      </a:solidFill>
+      <a:ln w="9525" cap="flat" cmpd="sng" algn="ctr">
+        <a:solidFill>
+          <a:schemeClr val="dk1">
+            <a:lumMod val="50000"/>
+            <a:lumOff val="50000"/>
+          </a:schemeClr>
+        </a:solidFill>
+        <a:round/>
+      </a:ln>
+    </cs:spPr>
+  </cs:upBar>
+  <cs:valueAxis>
+    <cs:lnRef idx="0"/>
+    <cs:fillRef idx="0"/>
+    <cs:effectRef idx="0"/>
+    <cs:fontRef idx="minor">
+      <a:schemeClr val="dk1">
+        <a:lumMod val="65000"/>
+        <a:lumOff val="35000"/>
+      </a:schemeClr>
+    </cs:fontRef>
+    <cs:defRPr sz="1197" kern="1200"/>
+  </cs:valueAxis>
+  <cs:wall>
+    <cs:lnRef idx="0"/>
+    <cs:fillRef idx="0"/>
+    <cs:effectRef idx="0"/>
+    <cs:fontRef idx="minor">
+      <a:schemeClr val="dk1"/>
+    </cs:fontRef>
+    <cs:spPr>
+      <a:pattFill prst="ltDnDiag">
+        <a:fgClr>
+          <a:schemeClr val="dk1">
+            <a:lumMod val="15000"/>
+            <a:lumOff val="85000"/>
+          </a:schemeClr>
+        </a:fgClr>
+        <a:bgClr>
+          <a:schemeClr val="lt1"/>
+        </a:bgClr>
+      </a:pattFill>
+    </cs:spPr>
+  </cs:wall>
+</cs:chartStyle>
+</file>
+
+<file path=ppt/charts/style4.xml><?xml version="1.0" encoding="utf-8"?>
 <cs:chartStyle xmlns:cs="http://schemas.microsoft.com/office/drawing/2012/chartStyle" xmlns:a="http://schemas.openxmlformats.org/drawingml/2006/main" id="208">
   <cs:axisTitle>
     <cs:lnRef idx="0"/>
@@ -2317,7 +4389,7 @@
           <a:p>
             <a:fld id="{7FF436C9-A2EA-456D-A843-0E5112E88CE3}" type="datetimeFigureOut">
               <a:rPr lang="ko-KR" altLang="en-US" smtClean="0"/>
-              <a:t>2026-03-18</a:t>
+              <a:t>2026-03-19</a:t>
             </a:fld>
             <a:endParaRPr lang="ko-KR" altLang="en-US"/>
           </a:p>
@@ -2693,7 +4765,7 @@
           <a:p>
             <a:fld id="{2064E3D3-B515-4C81-B19B-1140EF513BE4}" type="datetimeFigureOut">
               <a:rPr lang="ko-KR" altLang="en-US" smtClean="0"/>
-              <a:t>2026-03-18</a:t>
+              <a:t>2026-03-19</a:t>
             </a:fld>
             <a:endParaRPr lang="ko-KR" altLang="en-US"/>
           </a:p>
@@ -5789,6 +7861,2214 @@
 </p:sld>
 </file>
 
+<file path=ppt/slides/slide2.xml><?xml version="1.0" encoding="utf-8"?>
+<p:sld xmlns:a="http://schemas.openxmlformats.org/drawingml/2006/main" xmlns:r="http://schemas.openxmlformats.org/officeDocument/2006/relationships" xmlns:p="http://schemas.openxmlformats.org/presentationml/2006/main">
+  <p:cSld>
+    <p:spTree>
+      <p:nvGrpSpPr>
+        <p:cNvPr id="1" name="">
+          <a:extLst>
+            <a:ext uri="{FF2B5EF4-FFF2-40B4-BE49-F238E27FC236}">
+              <a16:creationId xmlns:a16="http://schemas.microsoft.com/office/drawing/2014/main" id="{263924C4-D97F-0FCB-6159-E3E69148B2C7}"/>
+            </a:ext>
+          </a:extLst>
+        </p:cNvPr>
+        <p:cNvGrpSpPr/>
+        <p:nvPr/>
+      </p:nvGrpSpPr>
+      <p:grpSpPr>
+        <a:xfrm>
+          <a:off x="0" y="0"/>
+          <a:ext cx="0" cy="0"/>
+          <a:chOff x="0" y="0"/>
+          <a:chExt cx="0" cy="0"/>
+        </a:xfrm>
+      </p:grpSpPr>
+      <p:sp>
+        <p:nvSpPr>
+          <p:cNvPr id="55" name="화살표: 오른쪽 54">
+            <a:extLst>
+              <a:ext uri="{FF2B5EF4-FFF2-40B4-BE49-F238E27FC236}">
+                <a16:creationId xmlns:a16="http://schemas.microsoft.com/office/drawing/2014/main" id="{50CBCE63-26BC-4CEC-0F9F-FDB1E29C498C}"/>
+              </a:ext>
+            </a:extLst>
+          </p:cNvPr>
+          <p:cNvSpPr/>
+          <p:nvPr/>
+        </p:nvSpPr>
+        <p:spPr>
+          <a:xfrm>
+            <a:off x="2366000" y="3196460"/>
+            <a:ext cx="7523435" cy="362515"/>
+          </a:xfrm>
+          <a:prstGeom prst="rightArrow">
+            <a:avLst>
+              <a:gd name="adj1" fmla="val 50000"/>
+              <a:gd name="adj2" fmla="val 101533"/>
+            </a:avLst>
+          </a:prstGeom>
+          <a:solidFill>
+            <a:srgbClr val="D9E1F2"/>
+          </a:solidFill>
+          <a:ln>
+            <a:solidFill>
+              <a:srgbClr val="D9E1F2"/>
+            </a:solidFill>
+          </a:ln>
+        </p:spPr>
+        <p:style>
+          <a:lnRef idx="2">
+            <a:schemeClr val="accent1">
+              <a:shade val="50000"/>
+            </a:schemeClr>
+          </a:lnRef>
+          <a:fillRef idx="1">
+            <a:schemeClr val="accent1"/>
+          </a:fillRef>
+          <a:effectRef idx="0">
+            <a:schemeClr val="accent1"/>
+          </a:effectRef>
+          <a:fontRef idx="minor">
+            <a:schemeClr val="lt1"/>
+          </a:fontRef>
+        </p:style>
+        <p:txBody>
+          <a:bodyPr rtlCol="0" anchor="ctr"/>
+          <a:lstStyle/>
+          <a:p>
+            <a:pPr algn="ctr"/>
+            <a:endParaRPr lang="ko-KR" altLang="en-US" sz="1400" dirty="0"/>
+          </a:p>
+        </p:txBody>
+      </p:sp>
+      <p:cxnSp>
+        <p:nvCxnSpPr>
+          <p:cNvPr id="4" name="직선 연결선 3">
+            <a:extLst>
+              <a:ext uri="{FF2B5EF4-FFF2-40B4-BE49-F238E27FC236}">
+                <a16:creationId xmlns:a16="http://schemas.microsoft.com/office/drawing/2014/main" id="{982F79B1-5989-5375-AD78-9299401C1967}"/>
+              </a:ext>
+            </a:extLst>
+          </p:cNvPr>
+          <p:cNvCxnSpPr>
+            <a:cxnSpLocks/>
+          </p:cNvCxnSpPr>
+          <p:nvPr/>
+        </p:nvCxnSpPr>
+        <p:spPr>
+          <a:xfrm>
+            <a:off x="407988" y="882172"/>
+            <a:ext cx="11376025" cy="0"/>
+          </a:xfrm>
+          <a:prstGeom prst="line">
+            <a:avLst/>
+          </a:prstGeom>
+          <a:ln w="9525">
+            <a:solidFill>
+              <a:schemeClr val="bg1">
+                <a:lumMod val="75000"/>
+              </a:schemeClr>
+            </a:solidFill>
+          </a:ln>
+        </p:spPr>
+        <p:style>
+          <a:lnRef idx="1">
+            <a:schemeClr val="accent1"/>
+          </a:lnRef>
+          <a:fillRef idx="0">
+            <a:schemeClr val="accent1"/>
+          </a:fillRef>
+          <a:effectRef idx="0">
+            <a:schemeClr val="accent1"/>
+          </a:effectRef>
+          <a:fontRef idx="minor">
+            <a:schemeClr val="tx1"/>
+          </a:fontRef>
+        </p:style>
+      </p:cxnSp>
+      <p:sp>
+        <p:nvSpPr>
+          <p:cNvPr id="7" name="TextBox 6">
+            <a:extLst>
+              <a:ext uri="{FF2B5EF4-FFF2-40B4-BE49-F238E27FC236}">
+                <a16:creationId xmlns:a16="http://schemas.microsoft.com/office/drawing/2014/main" id="{1D881F1A-973B-9C67-C9EB-236168DE4FDD}"/>
+              </a:ext>
+            </a:extLst>
+          </p:cNvPr>
+          <p:cNvSpPr txBox="1"/>
+          <p:nvPr/>
+        </p:nvSpPr>
+        <p:spPr>
+          <a:xfrm>
+            <a:off x="310895" y="504183"/>
+            <a:ext cx="8160005" cy="381579"/>
+          </a:xfrm>
+          <a:prstGeom prst="rect">
+            <a:avLst/>
+          </a:prstGeom>
+          <a:noFill/>
+        </p:spPr>
+        <p:txBody>
+          <a:bodyPr wrap="square">
+            <a:spAutoFit/>
+          </a:bodyPr>
+          <a:lstStyle/>
+          <a:p>
+            <a:pPr>
+              <a:lnSpc>
+                <a:spcPct val="110000"/>
+              </a:lnSpc>
+              <a:defRPr/>
+            </a:pPr>
+            <a:r>
+              <a:rPr lang="en-US" altLang="ko-KR" b="1" dirty="0" err="1">
+                <a:solidFill>
+                  <a:schemeClr val="tx1">
+                    <a:lumMod val="65000"/>
+                    <a:lumOff val="35000"/>
+                  </a:schemeClr>
+                </a:solidFill>
+                <a:latin typeface="Arial" panose="020B0604020202020204" pitchFamily="34" charset="0"/>
+                <a:ea typeface="KoPub돋움체 Bold" panose="02020603020101020101" pitchFamily="18" charset="-127"/>
+                <a:cs typeface="Arial" panose="020B0604020202020204" pitchFamily="34" charset="0"/>
+              </a:rPr>
+              <a:t>CLiCK</a:t>
+            </a:r>
+            <a:r>
+              <a:rPr lang="en-US" altLang="ko-KR" b="1" dirty="0">
+                <a:solidFill>
+                  <a:schemeClr val="tx1">
+                    <a:lumMod val="65000"/>
+                    <a:lumOff val="35000"/>
+                  </a:schemeClr>
+                </a:solidFill>
+                <a:latin typeface="Arial" panose="020B0604020202020204" pitchFamily="34" charset="0"/>
+                <a:ea typeface="KoPub돋움체 Bold" panose="02020603020101020101" pitchFamily="18" charset="-127"/>
+                <a:cs typeface="Arial" panose="020B0604020202020204" pitchFamily="34" charset="0"/>
+              </a:rPr>
+              <a:t> IAM MICRO _ Competency Analysis</a:t>
+            </a:r>
+            <a:r>
+              <a:rPr lang="ko-KR" altLang="en-US" b="1" dirty="0">
+                <a:solidFill>
+                  <a:schemeClr val="tx1">
+                    <a:lumMod val="65000"/>
+                    <a:lumOff val="35000"/>
+                  </a:schemeClr>
+                </a:solidFill>
+                <a:latin typeface="Arial" panose="020B0604020202020204" pitchFamily="34" charset="0"/>
+                <a:ea typeface="KoPub돋움체 Bold" panose="02020603020101020101" pitchFamily="18" charset="-127"/>
+                <a:cs typeface="Arial" panose="020B0604020202020204" pitchFamily="34" charset="0"/>
+              </a:rPr>
+              <a:t> </a:t>
+            </a:r>
+            <a:r>
+              <a:rPr lang="en-US" altLang="ko-KR" b="1" dirty="0">
+                <a:solidFill>
+                  <a:schemeClr val="tx1">
+                    <a:lumMod val="65000"/>
+                    <a:lumOff val="35000"/>
+                  </a:schemeClr>
+                </a:solidFill>
+                <a:latin typeface="Arial" panose="020B0604020202020204" pitchFamily="34" charset="0"/>
+                <a:ea typeface="KoPub돋움체 Bold" panose="02020603020101020101" pitchFamily="18" charset="-127"/>
+                <a:cs typeface="Arial" panose="020B0604020202020204" pitchFamily="34" charset="0"/>
+              </a:rPr>
+              <a:t>_</a:t>
+            </a:r>
+            <a:r>
+              <a:rPr lang="ko-KR" altLang="en-US" b="1" dirty="0">
+                <a:solidFill>
+                  <a:schemeClr val="tx1">
+                    <a:lumMod val="65000"/>
+                    <a:lumOff val="35000"/>
+                  </a:schemeClr>
+                </a:solidFill>
+                <a:latin typeface="Arial" panose="020B0604020202020204" pitchFamily="34" charset="0"/>
+                <a:ea typeface="KoPub돋움체 Bold" panose="02020603020101020101" pitchFamily="18" charset="-127"/>
+                <a:cs typeface="Arial" panose="020B0604020202020204" pitchFamily="34" charset="0"/>
+              </a:rPr>
+              <a:t> 리더십 영향력 진단</a:t>
+            </a:r>
+            <a:r>
+              <a:rPr lang="en-US" altLang="ko-KR" b="1" dirty="0">
+                <a:solidFill>
+                  <a:schemeClr val="tx1">
+                    <a:lumMod val="65000"/>
+                    <a:lumOff val="35000"/>
+                  </a:schemeClr>
+                </a:solidFill>
+                <a:latin typeface="Arial" panose="020B0604020202020204" pitchFamily="34" charset="0"/>
+                <a:ea typeface="KoPub돋움체 Bold" panose="02020603020101020101" pitchFamily="18" charset="-127"/>
+                <a:cs typeface="Arial" panose="020B0604020202020204" pitchFamily="34" charset="0"/>
+              </a:rPr>
+              <a:t> _</a:t>
+            </a:r>
+            <a:endParaRPr lang="ko-KR" altLang="en-US" b="1" dirty="0">
+              <a:solidFill>
+                <a:schemeClr val="tx1">
+                  <a:lumMod val="65000"/>
+                  <a:lumOff val="35000"/>
+                </a:schemeClr>
+              </a:solidFill>
+              <a:latin typeface="Arial" panose="020B0604020202020204" pitchFamily="34" charset="0"/>
+              <a:ea typeface="KoPub돋움체 Bold" panose="02020603020101020101" pitchFamily="18" charset="-127"/>
+              <a:cs typeface="Arial" panose="020B0604020202020204" pitchFamily="34" charset="0"/>
+            </a:endParaRPr>
+          </a:p>
+        </p:txBody>
+      </p:sp>
+      <p:pic>
+        <p:nvPicPr>
+          <p:cNvPr id="11" name="circle1">
+            <a:extLst>
+              <a:ext uri="{FF2B5EF4-FFF2-40B4-BE49-F238E27FC236}">
+                <a16:creationId xmlns:a16="http://schemas.microsoft.com/office/drawing/2014/main" id="{B69479EA-AF1B-2D3C-A0B6-06FAC46D4D9C}"/>
+              </a:ext>
+            </a:extLst>
+          </p:cNvPr>
+          <p:cNvPicPr>
+            <a:picLocks noChangeArrowheads="1"/>
+          </p:cNvPicPr>
+          <p:nvPr/>
+        </p:nvPicPr>
+        <p:blipFill>
+          <a:blip r:embed="rId2">
+            <a:extLst>
+              <a:ext uri="{28A0092B-C50C-407E-A947-70E740481C1C}">
+                <a14:useLocalDpi xmlns:a14="http://schemas.microsoft.com/office/drawing/2010/main" val="0"/>
+              </a:ext>
+            </a:extLst>
+          </a:blip>
+          <a:srcRect/>
+          <a:stretch>
+            <a:fillRect/>
+          </a:stretch>
+        </p:blipFill>
+        <p:spPr bwMode="auto">
+          <a:xfrm>
+            <a:off x="8833611" y="3216154"/>
+            <a:ext cx="844983" cy="437638"/>
+          </a:xfrm>
+          <a:prstGeom prst="rect">
+            <a:avLst/>
+          </a:prstGeom>
+          <a:noFill/>
+          <a:ln>
+            <a:noFill/>
+          </a:ln>
+          <a:extLst>
+            <a:ext uri="{909E8E84-426E-40DD-AFC4-6F175D3DCCD1}">
+              <a14:hiddenFill xmlns:a14="http://schemas.microsoft.com/office/drawing/2010/main">
+                <a:solidFill>
+                  <a:srgbClr val="FFFFFF"/>
+                </a:solidFill>
+              </a14:hiddenFill>
+            </a:ext>
+            <a:ext uri="{91240B29-F687-4F45-9708-019B960494DF}">
+              <a14:hiddenLine xmlns:a14="http://schemas.microsoft.com/office/drawing/2010/main" w="12700" cap="rnd">
+                <a:solidFill>
+                  <a:srgbClr val="000000"/>
+                </a:solidFill>
+                <a:round/>
+                <a:headEnd/>
+                <a:tailEnd/>
+              </a14:hiddenLine>
+            </a:ext>
+          </a:extLst>
+        </p:spPr>
+      </p:pic>
+      <p:graphicFrame>
+        <p:nvGraphicFramePr>
+          <p:cNvPr id="16" name="chart_phase">
+            <a:extLst>
+              <a:ext uri="{FF2B5EF4-FFF2-40B4-BE49-F238E27FC236}">
+                <a16:creationId xmlns:a16="http://schemas.microsoft.com/office/drawing/2014/main" id="{A817EE17-3FF6-84B0-2D1E-8B7B43BA609C}"/>
+              </a:ext>
+            </a:extLst>
+          </p:cNvPr>
+          <p:cNvGraphicFramePr/>
+          <p:nvPr/>
+        </p:nvGraphicFramePr>
+        <p:xfrm>
+          <a:off x="2100263" y="1526931"/>
+          <a:ext cx="7920037" cy="2021483"/>
+        </p:xfrm>
+        <a:graphic>
+          <a:graphicData uri="http://schemas.openxmlformats.org/drawingml/2006/chart">
+            <c:chart xmlns:c="http://schemas.openxmlformats.org/drawingml/2006/chart" xmlns:r="http://schemas.openxmlformats.org/officeDocument/2006/relationships" r:id="rId3"/>
+          </a:graphicData>
+        </a:graphic>
+      </p:graphicFrame>
+      <p:sp>
+        <p:nvSpPr>
+          <p:cNvPr id="25" name="사각형: 둥근 모서리 24">
+            <a:extLst>
+              <a:ext uri="{FF2B5EF4-FFF2-40B4-BE49-F238E27FC236}">
+                <a16:creationId xmlns:a16="http://schemas.microsoft.com/office/drawing/2014/main" id="{B7206BCB-1E2E-8406-7952-5E0B1C11E191}"/>
+              </a:ext>
+            </a:extLst>
+          </p:cNvPr>
+          <p:cNvSpPr/>
+          <p:nvPr/>
+        </p:nvSpPr>
+        <p:spPr>
+          <a:xfrm>
+            <a:off x="4850320" y="1371367"/>
+            <a:ext cx="2491359" cy="244464"/>
+          </a:xfrm>
+          <a:prstGeom prst="roundRect">
+            <a:avLst>
+              <a:gd name="adj" fmla="val 50000"/>
+            </a:avLst>
+          </a:prstGeom>
+          <a:solidFill>
+            <a:schemeClr val="bg1"/>
+          </a:solidFill>
+          <a:ln>
+            <a:noFill/>
+          </a:ln>
+        </p:spPr>
+        <p:style>
+          <a:lnRef idx="2">
+            <a:schemeClr val="accent1">
+              <a:shade val="50000"/>
+            </a:schemeClr>
+          </a:lnRef>
+          <a:fillRef idx="1">
+            <a:schemeClr val="accent1"/>
+          </a:fillRef>
+          <a:effectRef idx="0">
+            <a:schemeClr val="accent1"/>
+          </a:effectRef>
+          <a:fontRef idx="minor">
+            <a:schemeClr val="lt1"/>
+          </a:fontRef>
+        </p:style>
+        <p:txBody>
+          <a:bodyPr lIns="0" rIns="0" rtlCol="0" anchor="ctr"/>
+          <a:lstStyle/>
+          <a:p>
+            <a:pPr algn="ctr"/>
+            <a:r>
+              <a:rPr lang="ko-KR" altLang="en-US" sz="1400" b="1" dirty="0">
+                <a:ln>
+                  <a:solidFill>
+                    <a:srgbClr val="4DB848">
+                      <a:alpha val="0"/>
+                    </a:srgbClr>
+                  </a:solidFill>
+                </a:ln>
+                <a:solidFill>
+                  <a:schemeClr val="tx1">
+                    <a:lumMod val="95000"/>
+                    <a:lumOff val="5000"/>
+                  </a:schemeClr>
+                </a:solidFill>
+                <a:latin typeface="Arial" panose="020B0604020202020204" pitchFamily="34" charset="0"/>
+                <a:ea typeface="KoPub돋움체 Bold" panose="02020603020101020101" pitchFamily="18" charset="-127"/>
+                <a:cs typeface="Arial" panose="020B0604020202020204" pitchFamily="34" charset="0"/>
+              </a:rPr>
+              <a:t>리더십 영향력 단계 진단 결과</a:t>
+            </a:r>
+          </a:p>
+        </p:txBody>
+      </p:sp>
+      <p:pic>
+        <p:nvPicPr>
+          <p:cNvPr id="2" name="circle2">
+            <a:extLst>
+              <a:ext uri="{FF2B5EF4-FFF2-40B4-BE49-F238E27FC236}">
+                <a16:creationId xmlns:a16="http://schemas.microsoft.com/office/drawing/2014/main" id="{F4A57BCD-AF8F-B184-49AB-2A7F3B480D64}"/>
+              </a:ext>
+            </a:extLst>
+          </p:cNvPr>
+          <p:cNvPicPr>
+            <a:picLocks noChangeArrowheads="1"/>
+          </p:cNvPicPr>
+          <p:nvPr/>
+        </p:nvPicPr>
+        <p:blipFill>
+          <a:blip r:embed="rId2">
+            <a:extLst>
+              <a:ext uri="{28A0092B-C50C-407E-A947-70E740481C1C}">
+                <a14:useLocalDpi xmlns:a14="http://schemas.microsoft.com/office/drawing/2010/main" val="0"/>
+              </a:ext>
+            </a:extLst>
+          </a:blip>
+          <a:srcRect/>
+          <a:stretch>
+            <a:fillRect/>
+          </a:stretch>
+        </p:blipFill>
+        <p:spPr bwMode="auto">
+          <a:xfrm>
+            <a:off x="3707536" y="3213331"/>
+            <a:ext cx="1142784" cy="437638"/>
+          </a:xfrm>
+          <a:prstGeom prst="rect">
+            <a:avLst/>
+          </a:prstGeom>
+          <a:noFill/>
+          <a:ln>
+            <a:noFill/>
+          </a:ln>
+          <a:extLst>
+            <a:ext uri="{909E8E84-426E-40DD-AFC4-6F175D3DCCD1}">
+              <a14:hiddenFill xmlns:a14="http://schemas.microsoft.com/office/drawing/2010/main">
+                <a:solidFill>
+                  <a:srgbClr val="FFFFFF"/>
+                </a:solidFill>
+              </a14:hiddenFill>
+            </a:ext>
+            <a:ext uri="{91240B29-F687-4F45-9708-019B960494DF}">
+              <a14:hiddenLine xmlns:a14="http://schemas.microsoft.com/office/drawing/2010/main" w="12700" cap="rnd">
+                <a:solidFill>
+                  <a:srgbClr val="000000"/>
+                </a:solidFill>
+                <a:round/>
+                <a:headEnd/>
+                <a:tailEnd/>
+              </a14:hiddenLine>
+            </a:ext>
+          </a:extLst>
+        </p:spPr>
+      </p:pic>
+      <p:sp>
+        <p:nvSpPr>
+          <p:cNvPr id="14" name="직사각형 13">
+            <a:extLst>
+              <a:ext uri="{FF2B5EF4-FFF2-40B4-BE49-F238E27FC236}">
+                <a16:creationId xmlns:a16="http://schemas.microsoft.com/office/drawing/2014/main" id="{268636F9-A6EC-B7A4-E4E8-E325B8D8F2FE}"/>
+              </a:ext>
+            </a:extLst>
+          </p:cNvPr>
+          <p:cNvSpPr/>
+          <p:nvPr/>
+        </p:nvSpPr>
+        <p:spPr>
+          <a:xfrm>
+            <a:off x="2376161" y="4409995"/>
+            <a:ext cx="3000052" cy="1638332"/>
+          </a:xfrm>
+          <a:prstGeom prst="rect">
+            <a:avLst/>
+          </a:prstGeom>
+          <a:solidFill>
+            <a:schemeClr val="accent5">
+              <a:lumMod val="20000"/>
+              <a:lumOff val="80000"/>
+              <a:alpha val="50000"/>
+            </a:schemeClr>
+          </a:solidFill>
+          <a:ln>
+            <a:solidFill>
+              <a:srgbClr val="D9E1F2"/>
+            </a:solidFill>
+          </a:ln>
+        </p:spPr>
+        <p:style>
+          <a:lnRef idx="2">
+            <a:schemeClr val="accent1">
+              <a:shade val="50000"/>
+            </a:schemeClr>
+          </a:lnRef>
+          <a:fillRef idx="1">
+            <a:schemeClr val="accent1"/>
+          </a:fillRef>
+          <a:effectRef idx="0">
+            <a:schemeClr val="accent1"/>
+          </a:effectRef>
+          <a:fontRef idx="minor">
+            <a:schemeClr val="lt1"/>
+          </a:fontRef>
+        </p:style>
+        <p:txBody>
+          <a:bodyPr rtlCol="0" anchor="ctr"/>
+          <a:lstStyle/>
+          <a:p>
+            <a:pPr algn="ctr"/>
+            <a:endParaRPr lang="ko-KR" altLang="en-US" sz="1400" dirty="0"/>
+          </a:p>
+        </p:txBody>
+      </p:sp>
+      <p:sp>
+        <p:nvSpPr>
+          <p:cNvPr id="15" name="직사각형 14">
+            <a:extLst>
+              <a:ext uri="{FF2B5EF4-FFF2-40B4-BE49-F238E27FC236}">
+                <a16:creationId xmlns:a16="http://schemas.microsoft.com/office/drawing/2014/main" id="{4F5E4FBC-46E5-A040-78BC-1906B3D923B0}"/>
+              </a:ext>
+            </a:extLst>
+          </p:cNvPr>
+          <p:cNvSpPr/>
+          <p:nvPr/>
+        </p:nvSpPr>
+        <p:spPr>
+          <a:xfrm>
+            <a:off x="5395868" y="4409994"/>
+            <a:ext cx="4483627" cy="1638333"/>
+          </a:xfrm>
+          <a:prstGeom prst="rect">
+            <a:avLst/>
+          </a:prstGeom>
+          <a:solidFill>
+            <a:srgbClr val="FFF2CC">
+              <a:alpha val="50000"/>
+            </a:srgbClr>
+          </a:solidFill>
+          <a:ln>
+            <a:solidFill>
+              <a:srgbClr val="D9E1F2"/>
+            </a:solidFill>
+          </a:ln>
+        </p:spPr>
+        <p:style>
+          <a:lnRef idx="2">
+            <a:schemeClr val="accent1">
+              <a:shade val="50000"/>
+            </a:schemeClr>
+          </a:lnRef>
+          <a:fillRef idx="1">
+            <a:schemeClr val="accent1"/>
+          </a:fillRef>
+          <a:effectRef idx="0">
+            <a:schemeClr val="accent1"/>
+          </a:effectRef>
+          <a:fontRef idx="minor">
+            <a:schemeClr val="lt1"/>
+          </a:fontRef>
+        </p:style>
+        <p:txBody>
+          <a:bodyPr rtlCol="0" anchor="ctr"/>
+          <a:lstStyle/>
+          <a:p>
+            <a:pPr algn="ctr"/>
+            <a:endParaRPr lang="ko-KR" altLang="en-US" sz="1400" dirty="0"/>
+          </a:p>
+        </p:txBody>
+      </p:sp>
+      <p:cxnSp>
+        <p:nvCxnSpPr>
+          <p:cNvPr id="17" name="직선 연결선 16">
+            <a:extLst>
+              <a:ext uri="{FF2B5EF4-FFF2-40B4-BE49-F238E27FC236}">
+                <a16:creationId xmlns:a16="http://schemas.microsoft.com/office/drawing/2014/main" id="{E27E5A9A-7408-25AE-5E5D-82B381B0C523}"/>
+              </a:ext>
+            </a:extLst>
+          </p:cNvPr>
+          <p:cNvCxnSpPr>
+            <a:cxnSpLocks/>
+          </p:cNvCxnSpPr>
+          <p:nvPr/>
+        </p:nvCxnSpPr>
+        <p:spPr>
+          <a:xfrm>
+            <a:off x="5385930" y="4031135"/>
+            <a:ext cx="0" cy="2002706"/>
+          </a:xfrm>
+          <a:prstGeom prst="line">
+            <a:avLst/>
+          </a:prstGeom>
+          <a:ln w="12700">
+            <a:solidFill>
+              <a:schemeClr val="bg1">
+                <a:lumMod val="50000"/>
+              </a:schemeClr>
+            </a:solidFill>
+          </a:ln>
+        </p:spPr>
+        <p:style>
+          <a:lnRef idx="1">
+            <a:schemeClr val="accent1"/>
+          </a:lnRef>
+          <a:fillRef idx="0">
+            <a:schemeClr val="accent1"/>
+          </a:fillRef>
+          <a:effectRef idx="0">
+            <a:schemeClr val="accent1"/>
+          </a:effectRef>
+          <a:fontRef idx="minor">
+            <a:schemeClr val="tx1"/>
+          </a:fontRef>
+        </p:style>
+      </p:cxnSp>
+      <p:sp>
+        <p:nvSpPr>
+          <p:cNvPr id="18" name="사각형: 둥근 모서리 17">
+            <a:extLst>
+              <a:ext uri="{FF2B5EF4-FFF2-40B4-BE49-F238E27FC236}">
+                <a16:creationId xmlns:a16="http://schemas.microsoft.com/office/drawing/2014/main" id="{4FBD8B46-DBD2-5A70-E8E9-79DC6B20CAF8}"/>
+              </a:ext>
+            </a:extLst>
+          </p:cNvPr>
+          <p:cNvSpPr/>
+          <p:nvPr/>
+        </p:nvSpPr>
+        <p:spPr>
+          <a:xfrm>
+            <a:off x="3618118" y="3984599"/>
+            <a:ext cx="495816" cy="183994"/>
+          </a:xfrm>
+          <a:prstGeom prst="roundRect">
+            <a:avLst>
+              <a:gd name="adj" fmla="val 50000"/>
+            </a:avLst>
+          </a:prstGeom>
+          <a:solidFill>
+            <a:schemeClr val="bg1"/>
+          </a:solidFill>
+          <a:ln>
+            <a:noFill/>
+          </a:ln>
+        </p:spPr>
+        <p:style>
+          <a:lnRef idx="2">
+            <a:schemeClr val="accent1">
+              <a:shade val="50000"/>
+            </a:schemeClr>
+          </a:lnRef>
+          <a:fillRef idx="1">
+            <a:schemeClr val="accent1"/>
+          </a:fillRef>
+          <a:effectRef idx="0">
+            <a:schemeClr val="accent1"/>
+          </a:effectRef>
+          <a:fontRef idx="minor">
+            <a:schemeClr val="lt1"/>
+          </a:fontRef>
+        </p:style>
+        <p:txBody>
+          <a:bodyPr lIns="0" rIns="0" rtlCol="0" anchor="ctr"/>
+          <a:lstStyle/>
+          <a:p>
+            <a:pPr algn="ctr"/>
+            <a:r>
+              <a:rPr lang="en-US" altLang="ko-KR" sz="1200" b="1" dirty="0">
+                <a:ln>
+                  <a:solidFill>
+                    <a:srgbClr val="4DB848">
+                      <a:alpha val="0"/>
+                    </a:srgbClr>
+                  </a:solidFill>
+                </a:ln>
+                <a:solidFill>
+                  <a:schemeClr val="tx1">
+                    <a:lumMod val="75000"/>
+                    <a:lumOff val="25000"/>
+                  </a:schemeClr>
+                </a:solidFill>
+                <a:latin typeface="Arial" panose="020B0604020202020204" pitchFamily="34" charset="0"/>
+                <a:ea typeface="KoPub돋움체 Bold" panose="02020603020101020101" pitchFamily="18" charset="-127"/>
+                <a:cs typeface="Arial" panose="020B0604020202020204" pitchFamily="34" charset="0"/>
+              </a:rPr>
+              <a:t>Pull</a:t>
+            </a:r>
+            <a:endParaRPr lang="ko-KR" altLang="en-US" sz="1200" b="1" dirty="0">
+              <a:ln>
+                <a:solidFill>
+                  <a:srgbClr val="4DB848">
+                    <a:alpha val="0"/>
+                  </a:srgbClr>
+                </a:solidFill>
+              </a:ln>
+              <a:solidFill>
+                <a:schemeClr val="tx1">
+                  <a:lumMod val="75000"/>
+                  <a:lumOff val="25000"/>
+                </a:schemeClr>
+              </a:solidFill>
+              <a:latin typeface="Arial" panose="020B0604020202020204" pitchFamily="34" charset="0"/>
+              <a:ea typeface="KoPub돋움체 Bold" panose="02020603020101020101" pitchFamily="18" charset="-127"/>
+              <a:cs typeface="Arial" panose="020B0604020202020204" pitchFamily="34" charset="0"/>
+            </a:endParaRPr>
+          </a:p>
+        </p:txBody>
+      </p:sp>
+      <p:sp>
+        <p:nvSpPr>
+          <p:cNvPr id="19" name="사각형: 둥근 모서리 18">
+            <a:extLst>
+              <a:ext uri="{FF2B5EF4-FFF2-40B4-BE49-F238E27FC236}">
+                <a16:creationId xmlns:a16="http://schemas.microsoft.com/office/drawing/2014/main" id="{85723E9A-7D43-367B-AA2A-EDB1C597882B}"/>
+              </a:ext>
+            </a:extLst>
+          </p:cNvPr>
+          <p:cNvSpPr/>
+          <p:nvPr/>
+        </p:nvSpPr>
+        <p:spPr>
+          <a:xfrm>
+            <a:off x="7350781" y="3951489"/>
+            <a:ext cx="564088" cy="249786"/>
+          </a:xfrm>
+          <a:prstGeom prst="roundRect">
+            <a:avLst>
+              <a:gd name="adj" fmla="val 50000"/>
+            </a:avLst>
+          </a:prstGeom>
+          <a:solidFill>
+            <a:schemeClr val="bg1"/>
+          </a:solidFill>
+          <a:ln>
+            <a:noFill/>
+          </a:ln>
+        </p:spPr>
+        <p:style>
+          <a:lnRef idx="2">
+            <a:schemeClr val="accent1">
+              <a:shade val="50000"/>
+            </a:schemeClr>
+          </a:lnRef>
+          <a:fillRef idx="1">
+            <a:schemeClr val="accent1"/>
+          </a:fillRef>
+          <a:effectRef idx="0">
+            <a:schemeClr val="accent1"/>
+          </a:effectRef>
+          <a:fontRef idx="minor">
+            <a:schemeClr val="lt1"/>
+          </a:fontRef>
+        </p:style>
+        <p:txBody>
+          <a:bodyPr lIns="0" rIns="0" rtlCol="0" anchor="ctr"/>
+          <a:lstStyle/>
+          <a:p>
+            <a:pPr algn="ctr"/>
+            <a:r>
+              <a:rPr lang="en-US" altLang="ko-KR" sz="1200" b="1" dirty="0">
+                <a:ln>
+                  <a:solidFill>
+                    <a:srgbClr val="4DB848">
+                      <a:alpha val="0"/>
+                    </a:srgbClr>
+                  </a:solidFill>
+                </a:ln>
+                <a:solidFill>
+                  <a:schemeClr val="tx1">
+                    <a:lumMod val="75000"/>
+                    <a:lumOff val="25000"/>
+                  </a:schemeClr>
+                </a:solidFill>
+                <a:latin typeface="Arial" panose="020B0604020202020204" pitchFamily="34" charset="0"/>
+                <a:ea typeface="KoPub돋움체 Bold" panose="02020603020101020101" pitchFamily="18" charset="-127"/>
+                <a:cs typeface="Arial" panose="020B0604020202020204" pitchFamily="34" charset="0"/>
+              </a:rPr>
+              <a:t>Push</a:t>
+            </a:r>
+            <a:endParaRPr lang="ko-KR" altLang="en-US" sz="1200" b="1" dirty="0">
+              <a:ln>
+                <a:solidFill>
+                  <a:srgbClr val="4DB848">
+                    <a:alpha val="0"/>
+                  </a:srgbClr>
+                </a:solidFill>
+              </a:ln>
+              <a:solidFill>
+                <a:schemeClr val="tx1">
+                  <a:lumMod val="75000"/>
+                  <a:lumOff val="25000"/>
+                </a:schemeClr>
+              </a:solidFill>
+              <a:latin typeface="Arial" panose="020B0604020202020204" pitchFamily="34" charset="0"/>
+              <a:ea typeface="KoPub돋움체 Bold" panose="02020603020101020101" pitchFamily="18" charset="-127"/>
+              <a:cs typeface="Arial" panose="020B0604020202020204" pitchFamily="34" charset="0"/>
+            </a:endParaRPr>
+          </a:p>
+        </p:txBody>
+      </p:sp>
+      <p:cxnSp>
+        <p:nvCxnSpPr>
+          <p:cNvPr id="20" name="직선 화살표 연결선 19">
+            <a:extLst>
+              <a:ext uri="{FF2B5EF4-FFF2-40B4-BE49-F238E27FC236}">
+                <a16:creationId xmlns:a16="http://schemas.microsoft.com/office/drawing/2014/main" id="{FB7E182E-5047-EDDF-B325-174D3B7DAEAA}"/>
+              </a:ext>
+            </a:extLst>
+          </p:cNvPr>
+          <p:cNvCxnSpPr/>
+          <p:nvPr/>
+        </p:nvCxnSpPr>
+        <p:spPr>
+          <a:xfrm>
+            <a:off x="2366000" y="4203362"/>
+            <a:ext cx="3000052" cy="0"/>
+          </a:xfrm>
+          <a:prstGeom prst="straightConnector1">
+            <a:avLst/>
+          </a:prstGeom>
+          <a:ln>
+            <a:headEnd type="triangle" w="med" len="med"/>
+            <a:tailEnd type="triangle" w="med" len="med"/>
+          </a:ln>
+        </p:spPr>
+        <p:style>
+          <a:lnRef idx="1">
+            <a:schemeClr val="accent1"/>
+          </a:lnRef>
+          <a:fillRef idx="0">
+            <a:schemeClr val="accent1"/>
+          </a:fillRef>
+          <a:effectRef idx="0">
+            <a:schemeClr val="accent1"/>
+          </a:effectRef>
+          <a:fontRef idx="minor">
+            <a:schemeClr val="tx1"/>
+          </a:fontRef>
+        </p:style>
+      </p:cxnSp>
+      <p:cxnSp>
+        <p:nvCxnSpPr>
+          <p:cNvPr id="21" name="직선 화살표 연결선 20">
+            <a:extLst>
+              <a:ext uri="{FF2B5EF4-FFF2-40B4-BE49-F238E27FC236}">
+                <a16:creationId xmlns:a16="http://schemas.microsoft.com/office/drawing/2014/main" id="{5DDA1C22-6CD3-9671-0A5D-D4477372CCB6}"/>
+              </a:ext>
+            </a:extLst>
+          </p:cNvPr>
+          <p:cNvCxnSpPr>
+            <a:cxnSpLocks/>
+          </p:cNvCxnSpPr>
+          <p:nvPr/>
+        </p:nvCxnSpPr>
+        <p:spPr>
+          <a:xfrm>
+            <a:off x="5376213" y="4198410"/>
+            <a:ext cx="4513222" cy="0"/>
+          </a:xfrm>
+          <a:prstGeom prst="straightConnector1">
+            <a:avLst/>
+          </a:prstGeom>
+          <a:ln>
+            <a:headEnd type="triangle" w="med" len="med"/>
+            <a:tailEnd type="triangle" w="med" len="med"/>
+          </a:ln>
+        </p:spPr>
+        <p:style>
+          <a:lnRef idx="1">
+            <a:schemeClr val="accent1"/>
+          </a:lnRef>
+          <a:fillRef idx="0">
+            <a:schemeClr val="accent1"/>
+          </a:fillRef>
+          <a:effectRef idx="0">
+            <a:schemeClr val="accent1"/>
+          </a:effectRef>
+          <a:fontRef idx="minor">
+            <a:schemeClr val="tx1"/>
+          </a:fontRef>
+        </p:style>
+      </p:cxnSp>
+      <p:graphicFrame>
+        <p:nvGraphicFramePr>
+          <p:cNvPr id="22" name="chart_strategy">
+            <a:extLst>
+              <a:ext uri="{FF2B5EF4-FFF2-40B4-BE49-F238E27FC236}">
+                <a16:creationId xmlns:a16="http://schemas.microsoft.com/office/drawing/2014/main" id="{F85F7525-9E19-545D-8F95-98DA3D45D298}"/>
+              </a:ext>
+            </a:extLst>
+          </p:cNvPr>
+          <p:cNvGraphicFramePr/>
+          <p:nvPr/>
+        </p:nvGraphicFramePr>
+        <p:xfrm>
+          <a:off x="2100263" y="3859921"/>
+          <a:ext cx="7920037" cy="2522672"/>
+        </p:xfrm>
+        <a:graphic>
+          <a:graphicData uri="http://schemas.openxmlformats.org/drawingml/2006/chart">
+            <c:chart xmlns:c="http://schemas.openxmlformats.org/drawingml/2006/chart" xmlns:r="http://schemas.openxmlformats.org/officeDocument/2006/relationships" r:id="rId4"/>
+          </a:graphicData>
+        </a:graphic>
+      </p:graphicFrame>
+      <p:pic>
+        <p:nvPicPr>
+          <p:cNvPr id="24" name="circle5">
+            <a:extLst>
+              <a:ext uri="{FF2B5EF4-FFF2-40B4-BE49-F238E27FC236}">
+                <a16:creationId xmlns:a16="http://schemas.microsoft.com/office/drawing/2014/main" id="{63ABE881-363F-5574-6D1A-5703A152FAA0}"/>
+              </a:ext>
+            </a:extLst>
+          </p:cNvPr>
+          <p:cNvPicPr>
+            <a:picLocks noChangeArrowheads="1"/>
+          </p:cNvPicPr>
+          <p:nvPr/>
+        </p:nvPicPr>
+        <p:blipFill>
+          <a:blip r:embed="rId2">
+            <a:extLst>
+              <a:ext uri="{28A0092B-C50C-407E-A947-70E740481C1C}">
+                <a14:useLocalDpi xmlns:a14="http://schemas.microsoft.com/office/drawing/2010/main" val="0"/>
+              </a:ext>
+            </a:extLst>
+          </a:blip>
+          <a:srcRect/>
+          <a:stretch>
+            <a:fillRect/>
+          </a:stretch>
+        </p:blipFill>
+        <p:spPr bwMode="auto">
+          <a:xfrm>
+            <a:off x="6863790" y="6019533"/>
+            <a:ext cx="819157" cy="465643"/>
+          </a:xfrm>
+          <a:prstGeom prst="rect">
+            <a:avLst/>
+          </a:prstGeom>
+          <a:noFill/>
+          <a:ln>
+            <a:noFill/>
+          </a:ln>
+          <a:extLst>
+            <a:ext uri="{909E8E84-426E-40DD-AFC4-6F175D3DCCD1}">
+              <a14:hiddenFill xmlns:a14="http://schemas.microsoft.com/office/drawing/2010/main">
+                <a:solidFill>
+                  <a:srgbClr val="FFFFFF"/>
+                </a:solidFill>
+              </a14:hiddenFill>
+            </a:ext>
+            <a:ext uri="{91240B29-F687-4F45-9708-019B960494DF}">
+              <a14:hiddenLine xmlns:a14="http://schemas.microsoft.com/office/drawing/2010/main" w="12700" cap="rnd">
+                <a:solidFill>
+                  <a:srgbClr val="000000"/>
+                </a:solidFill>
+                <a:round/>
+                <a:headEnd/>
+                <a:tailEnd/>
+              </a14:hiddenLine>
+            </a:ext>
+          </a:extLst>
+        </p:spPr>
+      </p:pic>
+      <p:pic>
+        <p:nvPicPr>
+          <p:cNvPr id="26" name="circle3">
+            <a:extLst>
+              <a:ext uri="{FF2B5EF4-FFF2-40B4-BE49-F238E27FC236}">
+                <a16:creationId xmlns:a16="http://schemas.microsoft.com/office/drawing/2014/main" id="{69B39673-2A53-8F76-145B-FE1FD9AAA9A4}"/>
+              </a:ext>
+            </a:extLst>
+          </p:cNvPr>
+          <p:cNvPicPr>
+            <a:picLocks noChangeArrowheads="1"/>
+          </p:cNvPicPr>
+          <p:nvPr/>
+        </p:nvPicPr>
+        <p:blipFill>
+          <a:blip r:embed="rId2">
+            <a:extLst>
+              <a:ext uri="{28A0092B-C50C-407E-A947-70E740481C1C}">
+                <a14:useLocalDpi xmlns:a14="http://schemas.microsoft.com/office/drawing/2010/main" val="0"/>
+              </a:ext>
+            </a:extLst>
+          </a:blip>
+          <a:srcRect/>
+          <a:stretch>
+            <a:fillRect/>
+          </a:stretch>
+        </p:blipFill>
+        <p:spPr bwMode="auto">
+          <a:xfrm>
+            <a:off x="3161389" y="6023461"/>
+            <a:ext cx="670351" cy="465643"/>
+          </a:xfrm>
+          <a:prstGeom prst="rect">
+            <a:avLst/>
+          </a:prstGeom>
+          <a:noFill/>
+          <a:ln>
+            <a:noFill/>
+          </a:ln>
+          <a:extLst>
+            <a:ext uri="{909E8E84-426E-40DD-AFC4-6F175D3DCCD1}">
+              <a14:hiddenFill xmlns:a14="http://schemas.microsoft.com/office/drawing/2010/main">
+                <a:solidFill>
+                  <a:srgbClr val="FFFFFF"/>
+                </a:solidFill>
+              </a14:hiddenFill>
+            </a:ext>
+            <a:ext uri="{91240B29-F687-4F45-9708-019B960494DF}">
+              <a14:hiddenLine xmlns:a14="http://schemas.microsoft.com/office/drawing/2010/main" w="12700" cap="rnd">
+                <a:solidFill>
+                  <a:srgbClr val="000000"/>
+                </a:solidFill>
+                <a:round/>
+                <a:headEnd/>
+                <a:tailEnd/>
+              </a14:hiddenLine>
+            </a:ext>
+          </a:extLst>
+        </p:spPr>
+      </p:pic>
+      <p:sp>
+        <p:nvSpPr>
+          <p:cNvPr id="28" name="TextBox 27">
+            <a:extLst>
+              <a:ext uri="{FF2B5EF4-FFF2-40B4-BE49-F238E27FC236}">
+                <a16:creationId xmlns:a16="http://schemas.microsoft.com/office/drawing/2014/main" id="{A56DE35A-159E-D1D9-EF91-406BE649DE48}"/>
+              </a:ext>
+            </a:extLst>
+          </p:cNvPr>
+          <p:cNvSpPr txBox="1"/>
+          <p:nvPr/>
+        </p:nvSpPr>
+        <p:spPr>
+          <a:xfrm>
+            <a:off x="310895" y="919070"/>
+            <a:ext cx="11473117" cy="317266"/>
+          </a:xfrm>
+          <a:prstGeom prst="rect">
+            <a:avLst/>
+          </a:prstGeom>
+          <a:solidFill>
+            <a:schemeClr val="bg1"/>
+          </a:solidFill>
+        </p:spPr>
+        <p:txBody>
+          <a:bodyPr wrap="square">
+            <a:spAutoFit/>
+          </a:bodyPr>
+          <a:lstStyle>
+            <a:defPPr>
+              <a:defRPr lang="en-US"/>
+            </a:defPPr>
+            <a:lvl1pPr>
+              <a:lnSpc>
+                <a:spcPct val="110000"/>
+              </a:lnSpc>
+              <a:defRPr sz="1400" b="1">
+                <a:ln>
+                  <a:solidFill>
+                    <a:srgbClr val="4DB848">
+                      <a:alpha val="0"/>
+                    </a:srgbClr>
+                  </a:solidFill>
+                </a:ln>
+                <a:solidFill>
+                  <a:schemeClr val="tx1">
+                    <a:lumMod val="65000"/>
+                    <a:lumOff val="35000"/>
+                  </a:schemeClr>
+                </a:solidFill>
+                <a:latin typeface="Arial" panose="020B0604020202020204" pitchFamily="34" charset="0"/>
+                <a:ea typeface="KoPub돋움체 Bold" panose="02020603020101020101" pitchFamily="18" charset="-127"/>
+                <a:cs typeface="Arial" panose="020B0604020202020204" pitchFamily="34" charset="0"/>
+              </a:defRPr>
+            </a:lvl1pPr>
+          </a:lstStyle>
+          <a:p>
+            <a:r>
+              <a:rPr lang="en-US" altLang="ko-KR" dirty="0"/>
+              <a:t>{{NAME}}</a:t>
+            </a:r>
+            <a:r>
+              <a:rPr lang="ko-KR" altLang="en-US" dirty="0"/>
+              <a:t> 님의 리더십 영향력 전략 진단 결과는 다음과 같습니다</a:t>
+            </a:r>
+            <a:r>
+              <a:rPr lang="en-US" altLang="ko-KR" dirty="0"/>
+              <a:t>. </a:t>
+            </a:r>
+            <a:endParaRPr lang="ko-KR" altLang="en-US" dirty="0"/>
+          </a:p>
+        </p:txBody>
+      </p:sp>
+      <p:sp>
+        <p:nvSpPr>
+          <p:cNvPr id="29" name="사각형: 둥근 모서리 28">
+            <a:extLst>
+              <a:ext uri="{FF2B5EF4-FFF2-40B4-BE49-F238E27FC236}">
+                <a16:creationId xmlns:a16="http://schemas.microsoft.com/office/drawing/2014/main" id="{BCE2B581-BCE1-DC28-55EF-DC0B82CF1E54}"/>
+              </a:ext>
+            </a:extLst>
+          </p:cNvPr>
+          <p:cNvSpPr/>
+          <p:nvPr/>
+        </p:nvSpPr>
+        <p:spPr>
+          <a:xfrm>
+            <a:off x="4850320" y="3718726"/>
+            <a:ext cx="2491359" cy="244464"/>
+          </a:xfrm>
+          <a:prstGeom prst="roundRect">
+            <a:avLst>
+              <a:gd name="adj" fmla="val 50000"/>
+            </a:avLst>
+          </a:prstGeom>
+          <a:solidFill>
+            <a:schemeClr val="bg1"/>
+          </a:solidFill>
+          <a:ln>
+            <a:noFill/>
+          </a:ln>
+        </p:spPr>
+        <p:style>
+          <a:lnRef idx="2">
+            <a:schemeClr val="accent1">
+              <a:shade val="50000"/>
+            </a:schemeClr>
+          </a:lnRef>
+          <a:fillRef idx="1">
+            <a:schemeClr val="accent1"/>
+          </a:fillRef>
+          <a:effectRef idx="0">
+            <a:schemeClr val="accent1"/>
+          </a:effectRef>
+          <a:fontRef idx="minor">
+            <a:schemeClr val="lt1"/>
+          </a:fontRef>
+        </p:style>
+        <p:txBody>
+          <a:bodyPr lIns="0" rIns="0" rtlCol="0" anchor="ctr"/>
+          <a:lstStyle/>
+          <a:p>
+            <a:pPr algn="ctr"/>
+            <a:r>
+              <a:rPr lang="ko-KR" altLang="en-US" sz="1400" b="1" dirty="0">
+                <a:ln>
+                  <a:solidFill>
+                    <a:srgbClr val="4DB848">
+                      <a:alpha val="0"/>
+                    </a:srgbClr>
+                  </a:solidFill>
+                </a:ln>
+                <a:solidFill>
+                  <a:schemeClr val="tx1">
+                    <a:lumMod val="95000"/>
+                    <a:lumOff val="5000"/>
+                  </a:schemeClr>
+                </a:solidFill>
+                <a:latin typeface="Arial" panose="020B0604020202020204" pitchFamily="34" charset="0"/>
+                <a:ea typeface="KoPub돋움체 Bold" panose="02020603020101020101" pitchFamily="18" charset="-127"/>
+                <a:cs typeface="Arial" panose="020B0604020202020204" pitchFamily="34" charset="0"/>
+              </a:rPr>
+              <a:t>리더십 영향력 전략 진단 결과</a:t>
+            </a:r>
+          </a:p>
+        </p:txBody>
+      </p:sp>
+      <p:pic>
+        <p:nvPicPr>
+          <p:cNvPr id="3" name="circle4">
+            <a:extLst>
+              <a:ext uri="{FF2B5EF4-FFF2-40B4-BE49-F238E27FC236}">
+                <a16:creationId xmlns:a16="http://schemas.microsoft.com/office/drawing/2014/main" id="{E893F35E-236E-E11A-368C-1BB23272DD6A}"/>
+              </a:ext>
+            </a:extLst>
+          </p:cNvPr>
+          <p:cNvPicPr>
+            <a:picLocks noChangeArrowheads="1"/>
+          </p:cNvPicPr>
+          <p:nvPr/>
+        </p:nvPicPr>
+        <p:blipFill>
+          <a:blip r:embed="rId2">
+            <a:extLst>
+              <a:ext uri="{28A0092B-C50C-407E-A947-70E740481C1C}">
+                <a14:useLocalDpi xmlns:a14="http://schemas.microsoft.com/office/drawing/2010/main" val="0"/>
+              </a:ext>
+            </a:extLst>
+          </a:blip>
+          <a:srcRect/>
+          <a:stretch>
+            <a:fillRect/>
+          </a:stretch>
+        </p:blipFill>
+        <p:spPr bwMode="auto">
+          <a:xfrm>
+            <a:off x="3924487" y="6023461"/>
+            <a:ext cx="670351" cy="465643"/>
+          </a:xfrm>
+          <a:prstGeom prst="rect">
+            <a:avLst/>
+          </a:prstGeom>
+          <a:noFill/>
+          <a:ln>
+            <a:noFill/>
+          </a:ln>
+          <a:extLst>
+            <a:ext uri="{909E8E84-426E-40DD-AFC4-6F175D3DCCD1}">
+              <a14:hiddenFill xmlns:a14="http://schemas.microsoft.com/office/drawing/2010/main">
+                <a:solidFill>
+                  <a:srgbClr val="FFFFFF"/>
+                </a:solidFill>
+              </a14:hiddenFill>
+            </a:ext>
+            <a:ext uri="{91240B29-F687-4F45-9708-019B960494DF}">
+              <a14:hiddenLine xmlns:a14="http://schemas.microsoft.com/office/drawing/2010/main" w="12700" cap="rnd">
+                <a:solidFill>
+                  <a:srgbClr val="000000"/>
+                </a:solidFill>
+                <a:round/>
+                <a:headEnd/>
+                <a:tailEnd/>
+              </a14:hiddenLine>
+            </a:ext>
+          </a:extLst>
+        </p:spPr>
+      </p:pic>
+      <p:sp>
+        <p:nvSpPr>
+          <p:cNvPr id="6" name="text_NAME">
+            <a:extLst>
+              <a:ext uri="{FF2B5EF4-FFF2-40B4-BE49-F238E27FC236}">
+                <a16:creationId xmlns:a16="http://schemas.microsoft.com/office/drawing/2014/main" id="{F7CE973D-2AD7-89D4-5540-2BA30506B5D4}"/>
+              </a:ext>
+            </a:extLst>
+          </p:cNvPr>
+          <p:cNvSpPr txBox="1"/>
+          <p:nvPr/>
+        </p:nvSpPr>
+        <p:spPr>
+          <a:xfrm>
+            <a:off x="7189764" y="510306"/>
+            <a:ext cx="1134104" cy="369332"/>
+          </a:xfrm>
+          <a:prstGeom prst="rect">
+            <a:avLst/>
+          </a:prstGeom>
+          <a:noFill/>
+        </p:spPr>
+        <p:txBody>
+          <a:bodyPr wrap="square">
+            <a:spAutoFit/>
+          </a:bodyPr>
+          <a:lstStyle/>
+          <a:p>
+            <a:r>
+              <a:rPr lang="en-US" altLang="ko-KR" b="1" dirty="0">
+                <a:solidFill>
+                  <a:schemeClr val="tx1">
+                    <a:lumMod val="65000"/>
+                    <a:lumOff val="35000"/>
+                  </a:schemeClr>
+                </a:solidFill>
+                <a:latin typeface="Arial" panose="020B0604020202020204" pitchFamily="34" charset="0"/>
+                <a:ea typeface="KoPub돋움체 Bold" panose="02020603020101020101" pitchFamily="18" charset="-127"/>
+                <a:cs typeface="Arial" panose="020B0604020202020204" pitchFamily="34" charset="0"/>
+              </a:rPr>
+              <a:t>{{NAME}}</a:t>
+            </a:r>
+            <a:endParaRPr lang="ko-KR" altLang="en-US" dirty="0"/>
+          </a:p>
+        </p:txBody>
+      </p:sp>
+      <p:graphicFrame>
+        <p:nvGraphicFramePr>
+          <p:cNvPr id="8" name="table_phase">
+            <a:extLst>
+              <a:ext uri="{FF2B5EF4-FFF2-40B4-BE49-F238E27FC236}">
+                <a16:creationId xmlns:a16="http://schemas.microsoft.com/office/drawing/2014/main" id="{E5D54932-725F-0465-518B-A74AF30D1379}"/>
+              </a:ext>
+            </a:extLst>
+          </p:cNvPr>
+          <p:cNvGraphicFramePr>
+            <a:graphicFrameLocks noGrp="1"/>
+          </p:cNvGraphicFramePr>
+          <p:nvPr/>
+        </p:nvGraphicFramePr>
+        <p:xfrm>
+          <a:off x="-2057475" y="1108128"/>
+          <a:ext cx="1982269" cy="1126811"/>
+        </p:xfrm>
+        <a:graphic>
+          <a:graphicData uri="http://schemas.openxmlformats.org/drawingml/2006/table">
+            <a:tbl>
+              <a:tblPr>
+                <a:tableStyleId>{5C22544A-7EE6-4342-B048-85BDC9FD1C3A}</a:tableStyleId>
+              </a:tblPr>
+              <a:tblGrid>
+                <a:gridCol w="1168363">
+                  <a:extLst>
+                    <a:ext uri="{9D8B030D-6E8A-4147-A177-3AD203B41FA5}">
+                      <a16:colId xmlns:a16="http://schemas.microsoft.com/office/drawing/2014/main" val="279838531"/>
+                    </a:ext>
+                  </a:extLst>
+                </a:gridCol>
+                <a:gridCol w="813906">
+                  <a:extLst>
+                    <a:ext uri="{9D8B030D-6E8A-4147-A177-3AD203B41FA5}">
+                      <a16:colId xmlns:a16="http://schemas.microsoft.com/office/drawing/2014/main" val="2355549984"/>
+                    </a:ext>
+                  </a:extLst>
+                </a:gridCol>
+              </a:tblGrid>
+              <a:tr h="160973">
+                <a:tc>
+                  <a:txBody>
+                    <a:bodyPr/>
+                    <a:lstStyle/>
+                    <a:p>
+                      <a:pPr algn="l" fontAlgn="b">
+                        <a:buNone/>
+                      </a:pPr>
+                      <a:r>
+                        <a:rPr lang="ko-KR" altLang="en-US" sz="900" b="0" i="0" u="none" strike="noStrike" dirty="0">
+                          <a:solidFill>
+                            <a:srgbClr val="000000"/>
+                          </a:solidFill>
+                          <a:effectLst/>
+                          <a:latin typeface="Pretendard" panose="02000503000000020004" pitchFamily="2" charset="-127"/>
+                          <a:ea typeface="Pretendard" panose="02000503000000020004" pitchFamily="2" charset="-127"/>
+                          <a:cs typeface="Pretendard" panose="02000503000000020004" pitchFamily="2" charset="-127"/>
+                        </a:rPr>
+                        <a:t>항목명</a:t>
+                      </a:r>
+                    </a:p>
+                  </a:txBody>
+                  <a:tcPr marL="6191" marR="6191" marT="6191" marB="0" anchor="b">
+                    <a:solidFill>
+                      <a:schemeClr val="accent6"/>
+                    </a:solidFill>
+                  </a:tcPr>
+                </a:tc>
+                <a:tc>
+                  <a:txBody>
+                    <a:bodyPr/>
+                    <a:lstStyle/>
+                    <a:p>
+                      <a:pPr algn="l" fontAlgn="b">
+                        <a:buNone/>
+                      </a:pPr>
+                      <a:r>
+                        <a:rPr lang="ko-KR" altLang="en-US" sz="900" b="0" i="0" u="none" strike="noStrike" dirty="0">
+                          <a:solidFill>
+                            <a:srgbClr val="000000"/>
+                          </a:solidFill>
+                          <a:effectLst/>
+                          <a:latin typeface="Pretendard" panose="02000503000000020004" pitchFamily="2" charset="-127"/>
+                          <a:ea typeface="Pretendard" panose="02000503000000020004" pitchFamily="2" charset="-127"/>
+                          <a:cs typeface="Pretendard" panose="02000503000000020004" pitchFamily="2" charset="-127"/>
+                        </a:rPr>
+                        <a:t>평균점수</a:t>
+                      </a:r>
+                    </a:p>
+                  </a:txBody>
+                  <a:tcPr marL="6191" marR="6191" marT="6191" marB="0" anchor="b">
+                    <a:solidFill>
+                      <a:schemeClr val="accent6"/>
+                    </a:solidFill>
+                  </a:tcPr>
+                </a:tc>
+                <a:extLst>
+                  <a:ext uri="{0D108BD9-81ED-4DB2-BD59-A6C34878D82A}">
+                    <a16:rowId xmlns:a16="http://schemas.microsoft.com/office/drawing/2014/main" val="205790897"/>
+                  </a:ext>
+                </a:extLst>
+              </a:tr>
+              <a:tr h="160973">
+                <a:tc>
+                  <a:txBody>
+                    <a:bodyPr/>
+                    <a:lstStyle/>
+                    <a:p>
+                      <a:endParaRPr sz="900" dirty="0">
+                        <a:latin typeface="Pretendard" panose="02000503000000020004" pitchFamily="2" charset="-127"/>
+                        <a:ea typeface="Pretendard" panose="02000503000000020004" pitchFamily="2" charset="-127"/>
+                        <a:cs typeface="Pretendard" panose="02000503000000020004" pitchFamily="2" charset="-127"/>
+                      </a:endParaRPr>
+                    </a:p>
+                  </a:txBody>
+                  <a:tcPr marL="6191" marR="6191" marT="6191" marB="0" anchor="b">
+                    <a:solidFill>
+                      <a:schemeClr val="accent6"/>
+                    </a:solidFill>
+                  </a:tcPr>
+                </a:tc>
+                <a:tc>
+                  <a:txBody>
+                    <a:bodyPr/>
+                    <a:lstStyle/>
+                    <a:p>
+                      <a:endParaRPr sz="900">
+                        <a:latin typeface="Pretendard" panose="02000503000000020004" pitchFamily="2" charset="-127"/>
+                        <a:ea typeface="Pretendard" panose="02000503000000020004" pitchFamily="2" charset="-127"/>
+                        <a:cs typeface="Pretendard" panose="02000503000000020004" pitchFamily="2" charset="-127"/>
+                      </a:endParaRPr>
+                    </a:p>
+                  </a:txBody>
+                  <a:tcPr marL="6191" marR="6191" marT="6191" marB="0" anchor="b">
+                    <a:solidFill>
+                      <a:schemeClr val="accent6"/>
+                    </a:solidFill>
+                  </a:tcPr>
+                </a:tc>
+                <a:extLst>
+                  <a:ext uri="{0D108BD9-81ED-4DB2-BD59-A6C34878D82A}">
+                    <a16:rowId xmlns:a16="http://schemas.microsoft.com/office/drawing/2014/main" val="1753715540"/>
+                  </a:ext>
+                </a:extLst>
+              </a:tr>
+              <a:tr h="160973">
+                <a:tc>
+                  <a:txBody>
+                    <a:bodyPr/>
+                    <a:lstStyle/>
+                    <a:p>
+                      <a:endParaRPr sz="900" dirty="0">
+                        <a:latin typeface="Pretendard" panose="02000503000000020004" pitchFamily="2" charset="-127"/>
+                        <a:ea typeface="Pretendard" panose="02000503000000020004" pitchFamily="2" charset="-127"/>
+                        <a:cs typeface="Pretendard" panose="02000503000000020004" pitchFamily="2" charset="-127"/>
+                      </a:endParaRPr>
+                    </a:p>
+                  </a:txBody>
+                  <a:tcPr marL="6191" marR="6191" marT="6191" marB="0" anchor="b">
+                    <a:solidFill>
+                      <a:schemeClr val="accent6"/>
+                    </a:solidFill>
+                  </a:tcPr>
+                </a:tc>
+                <a:tc>
+                  <a:txBody>
+                    <a:bodyPr/>
+                    <a:lstStyle/>
+                    <a:p>
+                      <a:endParaRPr sz="900" dirty="0">
+                        <a:latin typeface="Pretendard" panose="02000503000000020004" pitchFamily="2" charset="-127"/>
+                        <a:ea typeface="Pretendard" panose="02000503000000020004" pitchFamily="2" charset="-127"/>
+                        <a:cs typeface="Pretendard" panose="02000503000000020004" pitchFamily="2" charset="-127"/>
+                      </a:endParaRPr>
+                    </a:p>
+                  </a:txBody>
+                  <a:tcPr marL="6191" marR="6191" marT="6191" marB="0" anchor="b">
+                    <a:solidFill>
+                      <a:schemeClr val="accent6"/>
+                    </a:solidFill>
+                  </a:tcPr>
+                </a:tc>
+                <a:extLst>
+                  <a:ext uri="{0D108BD9-81ED-4DB2-BD59-A6C34878D82A}">
+                    <a16:rowId xmlns:a16="http://schemas.microsoft.com/office/drawing/2014/main" val="1982899589"/>
+                  </a:ext>
+                </a:extLst>
+              </a:tr>
+              <a:tr h="160973">
+                <a:tc>
+                  <a:txBody>
+                    <a:bodyPr/>
+                    <a:lstStyle/>
+                    <a:p>
+                      <a:endParaRPr sz="900">
+                        <a:latin typeface="Pretendard" panose="02000503000000020004" pitchFamily="2" charset="-127"/>
+                        <a:ea typeface="Pretendard" panose="02000503000000020004" pitchFamily="2" charset="-127"/>
+                        <a:cs typeface="Pretendard" panose="02000503000000020004" pitchFamily="2" charset="-127"/>
+                      </a:endParaRPr>
+                    </a:p>
+                  </a:txBody>
+                  <a:tcPr marL="6191" marR="6191" marT="6191" marB="0" anchor="b">
+                    <a:solidFill>
+                      <a:schemeClr val="accent6"/>
+                    </a:solidFill>
+                  </a:tcPr>
+                </a:tc>
+                <a:tc>
+                  <a:txBody>
+                    <a:bodyPr/>
+                    <a:lstStyle/>
+                    <a:p>
+                      <a:endParaRPr sz="900" dirty="0">
+                        <a:latin typeface="Pretendard" panose="02000503000000020004" pitchFamily="2" charset="-127"/>
+                        <a:ea typeface="Pretendard" panose="02000503000000020004" pitchFamily="2" charset="-127"/>
+                        <a:cs typeface="Pretendard" panose="02000503000000020004" pitchFamily="2" charset="-127"/>
+                      </a:endParaRPr>
+                    </a:p>
+                  </a:txBody>
+                  <a:tcPr marL="6191" marR="6191" marT="6191" marB="0" anchor="b">
+                    <a:solidFill>
+                      <a:schemeClr val="accent6"/>
+                    </a:solidFill>
+                  </a:tcPr>
+                </a:tc>
+                <a:extLst>
+                  <a:ext uri="{0D108BD9-81ED-4DB2-BD59-A6C34878D82A}">
+                    <a16:rowId xmlns:a16="http://schemas.microsoft.com/office/drawing/2014/main" val="3629806957"/>
+                  </a:ext>
+                </a:extLst>
+              </a:tr>
+              <a:tr h="160973">
+                <a:tc>
+                  <a:txBody>
+                    <a:bodyPr/>
+                    <a:lstStyle/>
+                    <a:p>
+                      <a:endParaRPr sz="900" dirty="0">
+                        <a:latin typeface="Pretendard" panose="02000503000000020004" pitchFamily="2" charset="-127"/>
+                        <a:ea typeface="Pretendard" panose="02000503000000020004" pitchFamily="2" charset="-127"/>
+                        <a:cs typeface="Pretendard" panose="02000503000000020004" pitchFamily="2" charset="-127"/>
+                      </a:endParaRPr>
+                    </a:p>
+                  </a:txBody>
+                  <a:tcPr marL="6191" marR="6191" marT="6191" marB="0" anchor="b">
+                    <a:solidFill>
+                      <a:schemeClr val="accent6"/>
+                    </a:solidFill>
+                  </a:tcPr>
+                </a:tc>
+                <a:tc>
+                  <a:txBody>
+                    <a:bodyPr/>
+                    <a:lstStyle/>
+                    <a:p>
+                      <a:endParaRPr sz="900" dirty="0">
+                        <a:latin typeface="Pretendard" panose="02000503000000020004" pitchFamily="2" charset="-127"/>
+                        <a:ea typeface="Pretendard" panose="02000503000000020004" pitchFamily="2" charset="-127"/>
+                        <a:cs typeface="Pretendard" panose="02000503000000020004" pitchFamily="2" charset="-127"/>
+                      </a:endParaRPr>
+                    </a:p>
+                  </a:txBody>
+                  <a:tcPr marL="6191" marR="6191" marT="6191" marB="0" anchor="b">
+                    <a:solidFill>
+                      <a:schemeClr val="accent6"/>
+                    </a:solidFill>
+                  </a:tcPr>
+                </a:tc>
+                <a:extLst>
+                  <a:ext uri="{0D108BD9-81ED-4DB2-BD59-A6C34878D82A}">
+                    <a16:rowId xmlns:a16="http://schemas.microsoft.com/office/drawing/2014/main" val="2543043573"/>
+                  </a:ext>
+                </a:extLst>
+              </a:tr>
+              <a:tr h="160973">
+                <a:tc>
+                  <a:txBody>
+                    <a:bodyPr/>
+                    <a:lstStyle/>
+                    <a:p>
+                      <a:endParaRPr sz="900" dirty="0">
+                        <a:latin typeface="Pretendard" panose="02000503000000020004" pitchFamily="2" charset="-127"/>
+                        <a:ea typeface="Pretendard" panose="02000503000000020004" pitchFamily="2" charset="-127"/>
+                        <a:cs typeface="Pretendard" panose="02000503000000020004" pitchFamily="2" charset="-127"/>
+                      </a:endParaRPr>
+                    </a:p>
+                  </a:txBody>
+                  <a:tcPr marL="6191" marR="6191" marT="6191" marB="0" anchor="b">
+                    <a:solidFill>
+                      <a:schemeClr val="accent6"/>
+                    </a:solidFill>
+                  </a:tcPr>
+                </a:tc>
+                <a:tc>
+                  <a:txBody>
+                    <a:bodyPr/>
+                    <a:lstStyle/>
+                    <a:p>
+                      <a:endParaRPr sz="900" dirty="0">
+                        <a:latin typeface="Pretendard" panose="02000503000000020004" pitchFamily="2" charset="-127"/>
+                        <a:ea typeface="Pretendard" panose="02000503000000020004" pitchFamily="2" charset="-127"/>
+                        <a:cs typeface="Pretendard" panose="02000503000000020004" pitchFamily="2" charset="-127"/>
+                      </a:endParaRPr>
+                    </a:p>
+                  </a:txBody>
+                  <a:tcPr marL="6191" marR="6191" marT="6191" marB="0" anchor="b">
+                    <a:solidFill>
+                      <a:schemeClr val="accent6"/>
+                    </a:solidFill>
+                  </a:tcPr>
+                </a:tc>
+                <a:extLst>
+                  <a:ext uri="{0D108BD9-81ED-4DB2-BD59-A6C34878D82A}">
+                    <a16:rowId xmlns:a16="http://schemas.microsoft.com/office/drawing/2014/main" val="3007960184"/>
+                  </a:ext>
+                </a:extLst>
+              </a:tr>
+              <a:tr h="160973">
+                <a:tc>
+                  <a:txBody>
+                    <a:bodyPr/>
+                    <a:lstStyle/>
+                    <a:p>
+                      <a:endParaRPr sz="900">
+                        <a:latin typeface="Pretendard" panose="02000503000000020004" pitchFamily="2" charset="-127"/>
+                        <a:ea typeface="Pretendard" panose="02000503000000020004" pitchFamily="2" charset="-127"/>
+                        <a:cs typeface="Pretendard" panose="02000503000000020004" pitchFamily="2" charset="-127"/>
+                      </a:endParaRPr>
+                    </a:p>
+                  </a:txBody>
+                  <a:tcPr marL="6191" marR="6191" marT="6191" marB="0" anchor="b">
+                    <a:solidFill>
+                      <a:schemeClr val="accent6"/>
+                    </a:solidFill>
+                  </a:tcPr>
+                </a:tc>
+                <a:tc>
+                  <a:txBody>
+                    <a:bodyPr/>
+                    <a:lstStyle/>
+                    <a:p>
+                      <a:endParaRPr sz="900" dirty="0">
+                        <a:latin typeface="Pretendard" panose="02000503000000020004" pitchFamily="2" charset="-127"/>
+                        <a:ea typeface="Pretendard" panose="02000503000000020004" pitchFamily="2" charset="-127"/>
+                        <a:cs typeface="Pretendard" panose="02000503000000020004" pitchFamily="2" charset="-127"/>
+                      </a:endParaRPr>
+                    </a:p>
+                  </a:txBody>
+                  <a:tcPr marL="6191" marR="6191" marT="6191" marB="0" anchor="b">
+                    <a:solidFill>
+                      <a:schemeClr val="accent6"/>
+                    </a:solidFill>
+                  </a:tcPr>
+                </a:tc>
+                <a:extLst>
+                  <a:ext uri="{0D108BD9-81ED-4DB2-BD59-A6C34878D82A}">
+                    <a16:rowId xmlns:a16="http://schemas.microsoft.com/office/drawing/2014/main" val="871243760"/>
+                  </a:ext>
+                </a:extLst>
+              </a:tr>
+            </a:tbl>
+          </a:graphicData>
+        </a:graphic>
+      </p:graphicFrame>
+      <p:graphicFrame>
+        <p:nvGraphicFramePr>
+          <p:cNvPr id="9" name="table_strategy">
+            <a:extLst>
+              <a:ext uri="{FF2B5EF4-FFF2-40B4-BE49-F238E27FC236}">
+                <a16:creationId xmlns:a16="http://schemas.microsoft.com/office/drawing/2014/main" id="{20DFD45B-2F28-E1DA-F195-03135C10BB71}"/>
+              </a:ext>
+            </a:extLst>
+          </p:cNvPr>
+          <p:cNvGraphicFramePr>
+            <a:graphicFrameLocks noGrp="1"/>
+          </p:cNvGraphicFramePr>
+          <p:nvPr/>
+        </p:nvGraphicFramePr>
+        <p:xfrm>
+          <a:off x="-2057476" y="4665754"/>
+          <a:ext cx="1982269" cy="1770703"/>
+        </p:xfrm>
+        <a:graphic>
+          <a:graphicData uri="http://schemas.openxmlformats.org/drawingml/2006/table">
+            <a:tbl>
+              <a:tblPr>
+                <a:tableStyleId>{5C22544A-7EE6-4342-B048-85BDC9FD1C3A}</a:tableStyleId>
+              </a:tblPr>
+              <a:tblGrid>
+                <a:gridCol w="1168363">
+                  <a:extLst>
+                    <a:ext uri="{9D8B030D-6E8A-4147-A177-3AD203B41FA5}">
+                      <a16:colId xmlns:a16="http://schemas.microsoft.com/office/drawing/2014/main" val="279838531"/>
+                    </a:ext>
+                  </a:extLst>
+                </a:gridCol>
+                <a:gridCol w="813906">
+                  <a:extLst>
+                    <a:ext uri="{9D8B030D-6E8A-4147-A177-3AD203B41FA5}">
+                      <a16:colId xmlns:a16="http://schemas.microsoft.com/office/drawing/2014/main" val="2355549984"/>
+                    </a:ext>
+                  </a:extLst>
+                </a:gridCol>
+              </a:tblGrid>
+              <a:tr h="160973">
+                <a:tc>
+                  <a:txBody>
+                    <a:bodyPr/>
+                    <a:lstStyle/>
+                    <a:p>
+                      <a:pPr algn="l" fontAlgn="b">
+                        <a:buNone/>
+                      </a:pPr>
+                      <a:r>
+                        <a:rPr lang="ko-KR" altLang="en-US" sz="900" b="0" i="0" u="none" strike="noStrike" dirty="0">
+                          <a:solidFill>
+                            <a:srgbClr val="000000"/>
+                          </a:solidFill>
+                          <a:effectLst/>
+                          <a:latin typeface="Pretendard" panose="02000503000000020004" pitchFamily="2" charset="-127"/>
+                          <a:ea typeface="Pretendard" panose="02000503000000020004" pitchFamily="2" charset="-127"/>
+                          <a:cs typeface="Pretendard" panose="02000503000000020004" pitchFamily="2" charset="-127"/>
+                        </a:rPr>
+                        <a:t>항목명</a:t>
+                      </a:r>
+                    </a:p>
+                  </a:txBody>
+                  <a:tcPr marL="6191" marR="6191" marT="6191" marB="0" anchor="b">
+                    <a:solidFill>
+                      <a:schemeClr val="accent6"/>
+                    </a:solidFill>
+                  </a:tcPr>
+                </a:tc>
+                <a:tc>
+                  <a:txBody>
+                    <a:bodyPr/>
+                    <a:lstStyle/>
+                    <a:p>
+                      <a:pPr algn="l" fontAlgn="b">
+                        <a:buNone/>
+                      </a:pPr>
+                      <a:r>
+                        <a:rPr lang="ko-KR" altLang="en-US" sz="900" b="0" i="0" u="none" strike="noStrike" dirty="0">
+                          <a:solidFill>
+                            <a:srgbClr val="000000"/>
+                          </a:solidFill>
+                          <a:effectLst/>
+                          <a:latin typeface="Pretendard" panose="02000503000000020004" pitchFamily="2" charset="-127"/>
+                          <a:ea typeface="Pretendard" panose="02000503000000020004" pitchFamily="2" charset="-127"/>
+                          <a:cs typeface="Pretendard" panose="02000503000000020004" pitchFamily="2" charset="-127"/>
+                        </a:rPr>
+                        <a:t>평균점수</a:t>
+                      </a:r>
+                    </a:p>
+                  </a:txBody>
+                  <a:tcPr marL="6191" marR="6191" marT="6191" marB="0" anchor="b">
+                    <a:solidFill>
+                      <a:schemeClr val="accent6"/>
+                    </a:solidFill>
+                  </a:tcPr>
+                </a:tc>
+                <a:extLst>
+                  <a:ext uri="{0D108BD9-81ED-4DB2-BD59-A6C34878D82A}">
+                    <a16:rowId xmlns:a16="http://schemas.microsoft.com/office/drawing/2014/main" val="205790897"/>
+                  </a:ext>
+                </a:extLst>
+              </a:tr>
+              <a:tr h="160973">
+                <a:tc>
+                  <a:txBody>
+                    <a:bodyPr/>
+                    <a:lstStyle/>
+                    <a:p>
+                      <a:endParaRPr sz="900" dirty="0">
+                        <a:latin typeface="Pretendard" panose="02000503000000020004" pitchFamily="2" charset="-127"/>
+                        <a:ea typeface="Pretendard" panose="02000503000000020004" pitchFamily="2" charset="-127"/>
+                        <a:cs typeface="Pretendard" panose="02000503000000020004" pitchFamily="2" charset="-127"/>
+                      </a:endParaRPr>
+                    </a:p>
+                  </a:txBody>
+                  <a:tcPr marL="6191" marR="6191" marT="6191" marB="0" anchor="b">
+                    <a:solidFill>
+                      <a:schemeClr val="accent6"/>
+                    </a:solidFill>
+                  </a:tcPr>
+                </a:tc>
+                <a:tc>
+                  <a:txBody>
+                    <a:bodyPr/>
+                    <a:lstStyle/>
+                    <a:p>
+                      <a:endParaRPr sz="900">
+                        <a:latin typeface="Pretendard" panose="02000503000000020004" pitchFamily="2" charset="-127"/>
+                        <a:ea typeface="Pretendard" panose="02000503000000020004" pitchFamily="2" charset="-127"/>
+                        <a:cs typeface="Pretendard" panose="02000503000000020004" pitchFamily="2" charset="-127"/>
+                      </a:endParaRPr>
+                    </a:p>
+                  </a:txBody>
+                  <a:tcPr marL="6191" marR="6191" marT="6191" marB="0" anchor="b">
+                    <a:solidFill>
+                      <a:schemeClr val="accent6"/>
+                    </a:solidFill>
+                  </a:tcPr>
+                </a:tc>
+                <a:extLst>
+                  <a:ext uri="{0D108BD9-81ED-4DB2-BD59-A6C34878D82A}">
+                    <a16:rowId xmlns:a16="http://schemas.microsoft.com/office/drawing/2014/main" val="1753715540"/>
+                  </a:ext>
+                </a:extLst>
+              </a:tr>
+              <a:tr h="160973">
+                <a:tc>
+                  <a:txBody>
+                    <a:bodyPr/>
+                    <a:lstStyle/>
+                    <a:p>
+                      <a:endParaRPr sz="900" dirty="0">
+                        <a:latin typeface="Pretendard" panose="02000503000000020004" pitchFamily="2" charset="-127"/>
+                        <a:ea typeface="Pretendard" panose="02000503000000020004" pitchFamily="2" charset="-127"/>
+                        <a:cs typeface="Pretendard" panose="02000503000000020004" pitchFamily="2" charset="-127"/>
+                      </a:endParaRPr>
+                    </a:p>
+                  </a:txBody>
+                  <a:tcPr marL="6191" marR="6191" marT="6191" marB="0" anchor="b">
+                    <a:solidFill>
+                      <a:schemeClr val="accent6"/>
+                    </a:solidFill>
+                  </a:tcPr>
+                </a:tc>
+                <a:tc>
+                  <a:txBody>
+                    <a:bodyPr/>
+                    <a:lstStyle/>
+                    <a:p>
+                      <a:endParaRPr sz="900" dirty="0">
+                        <a:latin typeface="Pretendard" panose="02000503000000020004" pitchFamily="2" charset="-127"/>
+                        <a:ea typeface="Pretendard" panose="02000503000000020004" pitchFamily="2" charset="-127"/>
+                        <a:cs typeface="Pretendard" panose="02000503000000020004" pitchFamily="2" charset="-127"/>
+                      </a:endParaRPr>
+                    </a:p>
+                  </a:txBody>
+                  <a:tcPr marL="6191" marR="6191" marT="6191" marB="0" anchor="b">
+                    <a:solidFill>
+                      <a:schemeClr val="accent6"/>
+                    </a:solidFill>
+                  </a:tcPr>
+                </a:tc>
+                <a:extLst>
+                  <a:ext uri="{0D108BD9-81ED-4DB2-BD59-A6C34878D82A}">
+                    <a16:rowId xmlns:a16="http://schemas.microsoft.com/office/drawing/2014/main" val="1982899589"/>
+                  </a:ext>
+                </a:extLst>
+              </a:tr>
+              <a:tr h="160973">
+                <a:tc>
+                  <a:txBody>
+                    <a:bodyPr/>
+                    <a:lstStyle/>
+                    <a:p>
+                      <a:endParaRPr sz="900">
+                        <a:latin typeface="Pretendard" panose="02000503000000020004" pitchFamily="2" charset="-127"/>
+                        <a:ea typeface="Pretendard" panose="02000503000000020004" pitchFamily="2" charset="-127"/>
+                        <a:cs typeface="Pretendard" panose="02000503000000020004" pitchFamily="2" charset="-127"/>
+                      </a:endParaRPr>
+                    </a:p>
+                  </a:txBody>
+                  <a:tcPr marL="6191" marR="6191" marT="6191" marB="0" anchor="b">
+                    <a:solidFill>
+                      <a:schemeClr val="accent6"/>
+                    </a:solidFill>
+                  </a:tcPr>
+                </a:tc>
+                <a:tc>
+                  <a:txBody>
+                    <a:bodyPr/>
+                    <a:lstStyle/>
+                    <a:p>
+                      <a:endParaRPr sz="900" dirty="0">
+                        <a:latin typeface="Pretendard" panose="02000503000000020004" pitchFamily="2" charset="-127"/>
+                        <a:ea typeface="Pretendard" panose="02000503000000020004" pitchFamily="2" charset="-127"/>
+                        <a:cs typeface="Pretendard" panose="02000503000000020004" pitchFamily="2" charset="-127"/>
+                      </a:endParaRPr>
+                    </a:p>
+                  </a:txBody>
+                  <a:tcPr marL="6191" marR="6191" marT="6191" marB="0" anchor="b">
+                    <a:solidFill>
+                      <a:schemeClr val="accent6"/>
+                    </a:solidFill>
+                  </a:tcPr>
+                </a:tc>
+                <a:extLst>
+                  <a:ext uri="{0D108BD9-81ED-4DB2-BD59-A6C34878D82A}">
+                    <a16:rowId xmlns:a16="http://schemas.microsoft.com/office/drawing/2014/main" val="3629806957"/>
+                  </a:ext>
+                </a:extLst>
+              </a:tr>
+              <a:tr h="160973">
+                <a:tc>
+                  <a:txBody>
+                    <a:bodyPr/>
+                    <a:lstStyle/>
+                    <a:p>
+                      <a:endParaRPr sz="900" dirty="0">
+                        <a:latin typeface="Pretendard" panose="02000503000000020004" pitchFamily="2" charset="-127"/>
+                        <a:ea typeface="Pretendard" panose="02000503000000020004" pitchFamily="2" charset="-127"/>
+                        <a:cs typeface="Pretendard" panose="02000503000000020004" pitchFamily="2" charset="-127"/>
+                      </a:endParaRPr>
+                    </a:p>
+                  </a:txBody>
+                  <a:tcPr marL="6191" marR="6191" marT="6191" marB="0" anchor="b">
+                    <a:solidFill>
+                      <a:schemeClr val="accent6"/>
+                    </a:solidFill>
+                  </a:tcPr>
+                </a:tc>
+                <a:tc>
+                  <a:txBody>
+                    <a:bodyPr/>
+                    <a:lstStyle/>
+                    <a:p>
+                      <a:endParaRPr sz="900" dirty="0">
+                        <a:latin typeface="Pretendard" panose="02000503000000020004" pitchFamily="2" charset="-127"/>
+                        <a:ea typeface="Pretendard" panose="02000503000000020004" pitchFamily="2" charset="-127"/>
+                        <a:cs typeface="Pretendard" panose="02000503000000020004" pitchFamily="2" charset="-127"/>
+                      </a:endParaRPr>
+                    </a:p>
+                  </a:txBody>
+                  <a:tcPr marL="6191" marR="6191" marT="6191" marB="0" anchor="b">
+                    <a:solidFill>
+                      <a:schemeClr val="accent6"/>
+                    </a:solidFill>
+                  </a:tcPr>
+                </a:tc>
+                <a:extLst>
+                  <a:ext uri="{0D108BD9-81ED-4DB2-BD59-A6C34878D82A}">
+                    <a16:rowId xmlns:a16="http://schemas.microsoft.com/office/drawing/2014/main" val="2543043573"/>
+                  </a:ext>
+                </a:extLst>
+              </a:tr>
+              <a:tr h="160973">
+                <a:tc>
+                  <a:txBody>
+                    <a:bodyPr/>
+                    <a:lstStyle/>
+                    <a:p>
+                      <a:endParaRPr sz="900" dirty="0">
+                        <a:latin typeface="Pretendard" panose="02000503000000020004" pitchFamily="2" charset="-127"/>
+                        <a:ea typeface="Pretendard" panose="02000503000000020004" pitchFamily="2" charset="-127"/>
+                        <a:cs typeface="Pretendard" panose="02000503000000020004" pitchFamily="2" charset="-127"/>
+                      </a:endParaRPr>
+                    </a:p>
+                  </a:txBody>
+                  <a:tcPr marL="6191" marR="6191" marT="6191" marB="0" anchor="b">
+                    <a:solidFill>
+                      <a:schemeClr val="accent6"/>
+                    </a:solidFill>
+                  </a:tcPr>
+                </a:tc>
+                <a:tc>
+                  <a:txBody>
+                    <a:bodyPr/>
+                    <a:lstStyle/>
+                    <a:p>
+                      <a:endParaRPr sz="900" dirty="0">
+                        <a:latin typeface="Pretendard" panose="02000503000000020004" pitchFamily="2" charset="-127"/>
+                        <a:ea typeface="Pretendard" panose="02000503000000020004" pitchFamily="2" charset="-127"/>
+                        <a:cs typeface="Pretendard" panose="02000503000000020004" pitchFamily="2" charset="-127"/>
+                      </a:endParaRPr>
+                    </a:p>
+                  </a:txBody>
+                  <a:tcPr marL="6191" marR="6191" marT="6191" marB="0" anchor="b">
+                    <a:solidFill>
+                      <a:schemeClr val="accent6"/>
+                    </a:solidFill>
+                  </a:tcPr>
+                </a:tc>
+                <a:extLst>
+                  <a:ext uri="{0D108BD9-81ED-4DB2-BD59-A6C34878D82A}">
+                    <a16:rowId xmlns:a16="http://schemas.microsoft.com/office/drawing/2014/main" val="3007960184"/>
+                  </a:ext>
+                </a:extLst>
+              </a:tr>
+              <a:tr h="160973">
+                <a:tc>
+                  <a:txBody>
+                    <a:bodyPr/>
+                    <a:lstStyle/>
+                    <a:p>
+                      <a:endParaRPr sz="900" dirty="0">
+                        <a:latin typeface="Pretendard" panose="02000503000000020004" pitchFamily="2" charset="-127"/>
+                        <a:ea typeface="Pretendard" panose="02000503000000020004" pitchFamily="2" charset="-127"/>
+                        <a:cs typeface="Pretendard" panose="02000503000000020004" pitchFamily="2" charset="-127"/>
+                      </a:endParaRPr>
+                    </a:p>
+                  </a:txBody>
+                  <a:tcPr marL="6191" marR="6191" marT="6191" marB="0" anchor="b">
+                    <a:solidFill>
+                      <a:schemeClr val="accent6"/>
+                    </a:solidFill>
+                  </a:tcPr>
+                </a:tc>
+                <a:tc>
+                  <a:txBody>
+                    <a:bodyPr/>
+                    <a:lstStyle/>
+                    <a:p>
+                      <a:endParaRPr sz="900" dirty="0">
+                        <a:latin typeface="Pretendard" panose="02000503000000020004" pitchFamily="2" charset="-127"/>
+                        <a:ea typeface="Pretendard" panose="02000503000000020004" pitchFamily="2" charset="-127"/>
+                        <a:cs typeface="Pretendard" panose="02000503000000020004" pitchFamily="2" charset="-127"/>
+                      </a:endParaRPr>
+                    </a:p>
+                  </a:txBody>
+                  <a:tcPr marL="6191" marR="6191" marT="6191" marB="0" anchor="b">
+                    <a:solidFill>
+                      <a:schemeClr val="accent6"/>
+                    </a:solidFill>
+                  </a:tcPr>
+                </a:tc>
+                <a:extLst>
+                  <a:ext uri="{0D108BD9-81ED-4DB2-BD59-A6C34878D82A}">
+                    <a16:rowId xmlns:a16="http://schemas.microsoft.com/office/drawing/2014/main" val="1074187918"/>
+                  </a:ext>
+                </a:extLst>
+              </a:tr>
+              <a:tr h="160973">
+                <a:tc>
+                  <a:txBody>
+                    <a:bodyPr/>
+                    <a:lstStyle/>
+                    <a:p>
+                      <a:endParaRPr sz="900" dirty="0">
+                        <a:latin typeface="Pretendard" panose="02000503000000020004" pitchFamily="2" charset="-127"/>
+                        <a:ea typeface="Pretendard" panose="02000503000000020004" pitchFamily="2" charset="-127"/>
+                        <a:cs typeface="Pretendard" panose="02000503000000020004" pitchFamily="2" charset="-127"/>
+                      </a:endParaRPr>
+                    </a:p>
+                  </a:txBody>
+                  <a:tcPr marL="6191" marR="6191" marT="6191" marB="0" anchor="b">
+                    <a:solidFill>
+                      <a:schemeClr val="accent6"/>
+                    </a:solidFill>
+                  </a:tcPr>
+                </a:tc>
+                <a:tc>
+                  <a:txBody>
+                    <a:bodyPr/>
+                    <a:lstStyle/>
+                    <a:p>
+                      <a:endParaRPr sz="900" dirty="0">
+                        <a:latin typeface="Pretendard" panose="02000503000000020004" pitchFamily="2" charset="-127"/>
+                        <a:ea typeface="Pretendard" panose="02000503000000020004" pitchFamily="2" charset="-127"/>
+                        <a:cs typeface="Pretendard" panose="02000503000000020004" pitchFamily="2" charset="-127"/>
+                      </a:endParaRPr>
+                    </a:p>
+                  </a:txBody>
+                  <a:tcPr marL="6191" marR="6191" marT="6191" marB="0" anchor="b">
+                    <a:solidFill>
+                      <a:schemeClr val="accent6"/>
+                    </a:solidFill>
+                  </a:tcPr>
+                </a:tc>
+                <a:extLst>
+                  <a:ext uri="{0D108BD9-81ED-4DB2-BD59-A6C34878D82A}">
+                    <a16:rowId xmlns:a16="http://schemas.microsoft.com/office/drawing/2014/main" val="926797788"/>
+                  </a:ext>
+                </a:extLst>
+              </a:tr>
+              <a:tr h="160973">
+                <a:tc>
+                  <a:txBody>
+                    <a:bodyPr/>
+                    <a:lstStyle/>
+                    <a:p>
+                      <a:endParaRPr sz="900" dirty="0">
+                        <a:latin typeface="Pretendard" panose="02000503000000020004" pitchFamily="2" charset="-127"/>
+                        <a:ea typeface="Pretendard" panose="02000503000000020004" pitchFamily="2" charset="-127"/>
+                        <a:cs typeface="Pretendard" panose="02000503000000020004" pitchFamily="2" charset="-127"/>
+                      </a:endParaRPr>
+                    </a:p>
+                  </a:txBody>
+                  <a:tcPr marL="6191" marR="6191" marT="6191" marB="0" anchor="b">
+                    <a:solidFill>
+                      <a:schemeClr val="accent6"/>
+                    </a:solidFill>
+                  </a:tcPr>
+                </a:tc>
+                <a:tc>
+                  <a:txBody>
+                    <a:bodyPr/>
+                    <a:lstStyle/>
+                    <a:p>
+                      <a:endParaRPr sz="900" dirty="0">
+                        <a:latin typeface="Pretendard" panose="02000503000000020004" pitchFamily="2" charset="-127"/>
+                        <a:ea typeface="Pretendard" panose="02000503000000020004" pitchFamily="2" charset="-127"/>
+                        <a:cs typeface="Pretendard" panose="02000503000000020004" pitchFamily="2" charset="-127"/>
+                      </a:endParaRPr>
+                    </a:p>
+                  </a:txBody>
+                  <a:tcPr marL="6191" marR="6191" marT="6191" marB="0" anchor="b">
+                    <a:solidFill>
+                      <a:schemeClr val="accent6"/>
+                    </a:solidFill>
+                  </a:tcPr>
+                </a:tc>
+                <a:extLst>
+                  <a:ext uri="{0D108BD9-81ED-4DB2-BD59-A6C34878D82A}">
+                    <a16:rowId xmlns:a16="http://schemas.microsoft.com/office/drawing/2014/main" val="1930534886"/>
+                  </a:ext>
+                </a:extLst>
+              </a:tr>
+              <a:tr h="160973">
+                <a:tc>
+                  <a:txBody>
+                    <a:bodyPr/>
+                    <a:lstStyle/>
+                    <a:p>
+                      <a:endParaRPr sz="900" dirty="0">
+                        <a:latin typeface="Pretendard" panose="02000503000000020004" pitchFamily="2" charset="-127"/>
+                        <a:ea typeface="Pretendard" panose="02000503000000020004" pitchFamily="2" charset="-127"/>
+                        <a:cs typeface="Pretendard" panose="02000503000000020004" pitchFamily="2" charset="-127"/>
+                      </a:endParaRPr>
+                    </a:p>
+                  </a:txBody>
+                  <a:tcPr marL="6191" marR="6191" marT="6191" marB="0" anchor="b">
+                    <a:solidFill>
+                      <a:schemeClr val="accent6"/>
+                    </a:solidFill>
+                  </a:tcPr>
+                </a:tc>
+                <a:tc>
+                  <a:txBody>
+                    <a:bodyPr/>
+                    <a:lstStyle/>
+                    <a:p>
+                      <a:endParaRPr sz="900" dirty="0">
+                        <a:latin typeface="Pretendard" panose="02000503000000020004" pitchFamily="2" charset="-127"/>
+                        <a:ea typeface="Pretendard" panose="02000503000000020004" pitchFamily="2" charset="-127"/>
+                        <a:cs typeface="Pretendard" panose="02000503000000020004" pitchFamily="2" charset="-127"/>
+                      </a:endParaRPr>
+                    </a:p>
+                  </a:txBody>
+                  <a:tcPr marL="6191" marR="6191" marT="6191" marB="0" anchor="b">
+                    <a:solidFill>
+                      <a:schemeClr val="accent6"/>
+                    </a:solidFill>
+                  </a:tcPr>
+                </a:tc>
+                <a:extLst>
+                  <a:ext uri="{0D108BD9-81ED-4DB2-BD59-A6C34878D82A}">
+                    <a16:rowId xmlns:a16="http://schemas.microsoft.com/office/drawing/2014/main" val="1186525500"/>
+                  </a:ext>
+                </a:extLst>
+              </a:tr>
+              <a:tr h="160973">
+                <a:tc>
+                  <a:txBody>
+                    <a:bodyPr/>
+                    <a:lstStyle/>
+                    <a:p>
+                      <a:endParaRPr sz="900">
+                        <a:latin typeface="Pretendard" panose="02000503000000020004" pitchFamily="2" charset="-127"/>
+                        <a:ea typeface="Pretendard" panose="02000503000000020004" pitchFamily="2" charset="-127"/>
+                        <a:cs typeface="Pretendard" panose="02000503000000020004" pitchFamily="2" charset="-127"/>
+                      </a:endParaRPr>
+                    </a:p>
+                  </a:txBody>
+                  <a:tcPr marL="6191" marR="6191" marT="6191" marB="0" anchor="b">
+                    <a:solidFill>
+                      <a:schemeClr val="accent6"/>
+                    </a:solidFill>
+                  </a:tcPr>
+                </a:tc>
+                <a:tc>
+                  <a:txBody>
+                    <a:bodyPr/>
+                    <a:lstStyle/>
+                    <a:p>
+                      <a:endParaRPr sz="900" dirty="0">
+                        <a:latin typeface="Pretendard" panose="02000503000000020004" pitchFamily="2" charset="-127"/>
+                        <a:ea typeface="Pretendard" panose="02000503000000020004" pitchFamily="2" charset="-127"/>
+                        <a:cs typeface="Pretendard" panose="02000503000000020004" pitchFamily="2" charset="-127"/>
+                      </a:endParaRPr>
+                    </a:p>
+                  </a:txBody>
+                  <a:tcPr marL="6191" marR="6191" marT="6191" marB="0" anchor="b">
+                    <a:solidFill>
+                      <a:schemeClr val="accent6"/>
+                    </a:solidFill>
+                  </a:tcPr>
+                </a:tc>
+                <a:extLst>
+                  <a:ext uri="{0D108BD9-81ED-4DB2-BD59-A6C34878D82A}">
+                    <a16:rowId xmlns:a16="http://schemas.microsoft.com/office/drawing/2014/main" val="871243760"/>
+                  </a:ext>
+                </a:extLst>
+              </a:tr>
+            </a:tbl>
+          </a:graphicData>
+        </a:graphic>
+      </p:graphicFrame>
+    </p:spTree>
+    <p:extLst>
+      <p:ext uri="{BB962C8B-B14F-4D97-AF65-F5344CB8AC3E}">
+        <p14:creationId xmlns:p14="http://schemas.microsoft.com/office/powerpoint/2010/main" val="2198681309"/>
+      </p:ext>
+    </p:extLst>
+  </p:cSld>
+  <p:clrMapOvr>
+    <a:masterClrMapping/>
+  </p:clrMapOvr>
+</p:sld>
+</file>
+
 <file path=ppt/theme/theme1.xml><?xml version="1.0" encoding="utf-8"?>
 <a:theme xmlns:a="http://schemas.openxmlformats.org/drawingml/2006/main" name="1_Office 테마">
   <a:themeElements>
